--- a/clases/PR01_Introduccion/presentaciones/pptx/PRE01_Ochos.pptx
+++ b/clases/PR01_Introduccion/presentaciones/pptx/PRE01_Ochos.pptx
@@ -4,9 +4,12 @@
   <p:sldMasterIdLst>
     <p:sldMasterId id="2147483648" r:id="rId1"/>
   </p:sldMasterIdLst>
+  <p:notesMasterIdLst>
+    <p:notesMasterId r:id="rId28"/>
+  </p:notesMasterIdLst>
   <p:sldIdLst>
     <p:sldId id="280" r:id="rId2"/>
-    <p:sldId id="256" r:id="rId3"/>
+    <p:sldId id="282" r:id="rId3"/>
     <p:sldId id="257" r:id="rId4"/>
     <p:sldId id="258" r:id="rId5"/>
     <p:sldId id="274" r:id="rId6"/>
@@ -137,6 +140,356 @@
 </p:presentation>
 </file>
 
+<file path=ppt/notesMasters/notesMaster1.xml><?xml version="1.0" encoding="utf-8"?>
+<p:notesMaster xmlns:a="http://schemas.openxmlformats.org/drawingml/2006/main" xmlns:r="http://schemas.openxmlformats.org/officeDocument/2006/relationships" xmlns:p="http://schemas.openxmlformats.org/presentationml/2006/main">
+  <p:cSld>
+    <p:bg>
+      <p:bgRef idx="1001">
+        <a:schemeClr val="bg1"/>
+      </p:bgRef>
+    </p:bg>
+    <p:spTree>
+      <p:nvGrpSpPr>
+        <p:cNvPr id="1" name=""/>
+        <p:cNvGrpSpPr/>
+        <p:nvPr/>
+      </p:nvGrpSpPr>
+      <p:grpSpPr>
+        <a:xfrm>
+          <a:off x="0" y="0"/>
+          <a:ext cx="0" cy="0"/>
+          <a:chOff x="0" y="0"/>
+          <a:chExt cx="0" cy="0"/>
+        </a:xfrm>
+      </p:grpSpPr>
+      <p:sp>
+        <p:nvSpPr>
+          <p:cNvPr id="2" name="Header Placeholder 1"/>
+          <p:cNvSpPr>
+            <a:spLocks noGrp="1"/>
+          </p:cNvSpPr>
+          <p:nvPr>
+            <p:ph type="hdr" sz="quarter"/>
+          </p:nvPr>
+        </p:nvSpPr>
+        <p:spPr>
+          <a:xfrm>
+            <a:off x="0" y="0"/>
+            <a:ext cx="2971800" cy="458788"/>
+          </a:xfrm>
+          <a:prstGeom prst="rect">
+            <a:avLst/>
+          </a:prstGeom>
+        </p:spPr>
+        <p:txBody>
+          <a:bodyPr vert="horz" lIns="91440" tIns="45720" rIns="91440" bIns="45720" rtlCol="0"/>
+          <a:lstStyle>
+            <a:lvl1pPr algn="l">
+              <a:defRPr sz="1200"/>
+            </a:lvl1pPr>
+          </a:lstStyle>
+          <a:p>
+            <a:endParaRPr lang="en-CL"/>
+          </a:p>
+        </p:txBody>
+      </p:sp>
+      <p:sp>
+        <p:nvSpPr>
+          <p:cNvPr id="3" name="Date Placeholder 2"/>
+          <p:cNvSpPr>
+            <a:spLocks noGrp="1"/>
+          </p:cNvSpPr>
+          <p:nvPr>
+            <p:ph type="dt" idx="1"/>
+          </p:nvPr>
+        </p:nvSpPr>
+        <p:spPr>
+          <a:xfrm>
+            <a:off x="3884613" y="0"/>
+            <a:ext cx="2971800" cy="458788"/>
+          </a:xfrm>
+          <a:prstGeom prst="rect">
+            <a:avLst/>
+          </a:prstGeom>
+        </p:spPr>
+        <p:txBody>
+          <a:bodyPr vert="horz" lIns="91440" tIns="45720" rIns="91440" bIns="45720" rtlCol="0"/>
+          <a:lstStyle>
+            <a:lvl1pPr algn="r">
+              <a:defRPr sz="1200"/>
+            </a:lvl1pPr>
+          </a:lstStyle>
+          <a:p>
+            <a:fld id="{C95C26A9-002E-5F40-B38C-8C07BFE22C19}" type="datetimeFigureOut">
+              <a:rPr lang="en-CL" smtClean="0"/>
+              <a:t>04-08-26</a:t>
+            </a:fld>
+            <a:endParaRPr lang="en-CL"/>
+          </a:p>
+        </p:txBody>
+      </p:sp>
+      <p:sp>
+        <p:nvSpPr>
+          <p:cNvPr id="4" name="Slide Image Placeholder 3"/>
+          <p:cNvSpPr>
+            <a:spLocks noGrp="1" noRot="1" noChangeAspect="1"/>
+          </p:cNvSpPr>
+          <p:nvPr>
+            <p:ph type="sldImg" idx="2"/>
+          </p:nvPr>
+        </p:nvSpPr>
+        <p:spPr>
+          <a:xfrm>
+            <a:off x="685800" y="1143000"/>
+            <a:ext cx="5486400" cy="3086100"/>
+          </a:xfrm>
+          <a:prstGeom prst="rect">
+            <a:avLst/>
+          </a:prstGeom>
+          <a:noFill/>
+          <a:ln w="12700">
+            <a:solidFill>
+              <a:prstClr val="black"/>
+            </a:solidFill>
+          </a:ln>
+        </p:spPr>
+        <p:txBody>
+          <a:bodyPr vert="horz" lIns="91440" tIns="45720" rIns="91440" bIns="45720" rtlCol="0" anchor="ctr"/>
+          <a:lstStyle/>
+          <a:p>
+            <a:endParaRPr lang="en-CL"/>
+          </a:p>
+        </p:txBody>
+      </p:sp>
+      <p:sp>
+        <p:nvSpPr>
+          <p:cNvPr id="5" name="Notes Placeholder 4"/>
+          <p:cNvSpPr>
+            <a:spLocks noGrp="1"/>
+          </p:cNvSpPr>
+          <p:nvPr>
+            <p:ph type="body" sz="quarter" idx="3"/>
+          </p:nvPr>
+        </p:nvSpPr>
+        <p:spPr>
+          <a:xfrm>
+            <a:off x="685800" y="4400550"/>
+            <a:ext cx="5486400" cy="3600450"/>
+          </a:xfrm>
+          <a:prstGeom prst="rect">
+            <a:avLst/>
+          </a:prstGeom>
+        </p:spPr>
+        <p:txBody>
+          <a:bodyPr vert="horz" lIns="91440" tIns="45720" rIns="91440" bIns="45720" rtlCol="0"/>
+          <a:lstStyle/>
+          <a:p>
+            <a:pPr lvl="0"/>
+            <a:r>
+              <a:rPr lang="en-US"/>
+              <a:t>Click to edit Master text styles</a:t>
+            </a:r>
+          </a:p>
+          <a:p>
+            <a:pPr lvl="1"/>
+            <a:r>
+              <a:rPr lang="en-US"/>
+              <a:t>Second level</a:t>
+            </a:r>
+          </a:p>
+          <a:p>
+            <a:pPr lvl="2"/>
+            <a:r>
+              <a:rPr lang="en-US"/>
+              <a:t>Third level</a:t>
+            </a:r>
+          </a:p>
+          <a:p>
+            <a:pPr lvl="3"/>
+            <a:r>
+              <a:rPr lang="en-US"/>
+              <a:t>Fourth level</a:t>
+            </a:r>
+          </a:p>
+          <a:p>
+            <a:pPr lvl="4"/>
+            <a:r>
+              <a:rPr lang="en-US"/>
+              <a:t>Fifth level</a:t>
+            </a:r>
+            <a:endParaRPr lang="en-CL"/>
+          </a:p>
+        </p:txBody>
+      </p:sp>
+      <p:sp>
+        <p:nvSpPr>
+          <p:cNvPr id="6" name="Footer Placeholder 5"/>
+          <p:cNvSpPr>
+            <a:spLocks noGrp="1"/>
+          </p:cNvSpPr>
+          <p:nvPr>
+            <p:ph type="ftr" sz="quarter" idx="4"/>
+          </p:nvPr>
+        </p:nvSpPr>
+        <p:spPr>
+          <a:xfrm>
+            <a:off x="0" y="8685213"/>
+            <a:ext cx="2971800" cy="458787"/>
+          </a:xfrm>
+          <a:prstGeom prst="rect">
+            <a:avLst/>
+          </a:prstGeom>
+        </p:spPr>
+        <p:txBody>
+          <a:bodyPr vert="horz" lIns="91440" tIns="45720" rIns="91440" bIns="45720" rtlCol="0" anchor="b"/>
+          <a:lstStyle>
+            <a:lvl1pPr algn="l">
+              <a:defRPr sz="1200"/>
+            </a:lvl1pPr>
+          </a:lstStyle>
+          <a:p>
+            <a:endParaRPr lang="en-CL"/>
+          </a:p>
+        </p:txBody>
+      </p:sp>
+      <p:sp>
+        <p:nvSpPr>
+          <p:cNvPr id="7" name="Slide Number Placeholder 6"/>
+          <p:cNvSpPr>
+            <a:spLocks noGrp="1"/>
+          </p:cNvSpPr>
+          <p:nvPr>
+            <p:ph type="sldNum" sz="quarter" idx="5"/>
+          </p:nvPr>
+        </p:nvSpPr>
+        <p:spPr>
+          <a:xfrm>
+            <a:off x="3884613" y="8685213"/>
+            <a:ext cx="2971800" cy="458787"/>
+          </a:xfrm>
+          <a:prstGeom prst="rect">
+            <a:avLst/>
+          </a:prstGeom>
+        </p:spPr>
+        <p:txBody>
+          <a:bodyPr vert="horz" lIns="91440" tIns="45720" rIns="91440" bIns="45720" rtlCol="0" anchor="b"/>
+          <a:lstStyle>
+            <a:lvl1pPr algn="r">
+              <a:defRPr sz="1200"/>
+            </a:lvl1pPr>
+          </a:lstStyle>
+          <a:p>
+            <a:fld id="{FEE7B714-1829-794C-9346-99DC80A6030E}" type="slidenum">
+              <a:rPr lang="en-CL" smtClean="0"/>
+              <a:t>‹#›</a:t>
+            </a:fld>
+            <a:endParaRPr lang="en-CL"/>
+          </a:p>
+        </p:txBody>
+      </p:sp>
+    </p:spTree>
+    <p:extLst>
+      <p:ext uri="{BB962C8B-B14F-4D97-AF65-F5344CB8AC3E}">
+        <p14:creationId xmlns:p14="http://schemas.microsoft.com/office/powerpoint/2010/main" val="1970372261"/>
+      </p:ext>
+    </p:extLst>
+  </p:cSld>
+  <p:clrMap bg1="lt1" tx1="dk1" bg2="lt2" tx2="dk2" accent1="accent1" accent2="accent2" accent3="accent3" accent4="accent4" accent5="accent5" accent6="accent6" hlink="hlink" folHlink="folHlink"/>
+  <p:notesStyle>
+    <a:lvl1pPr marL="0" algn="l" defTabSz="914400" rtl="0" eaLnBrk="1" latinLnBrk="0" hangingPunct="1">
+      <a:defRPr sz="1200" kern="1200">
+        <a:solidFill>
+          <a:schemeClr val="tx1"/>
+        </a:solidFill>
+        <a:latin typeface="+mn-lt"/>
+        <a:ea typeface="+mn-ea"/>
+        <a:cs typeface="+mn-cs"/>
+      </a:defRPr>
+    </a:lvl1pPr>
+    <a:lvl2pPr marL="457200" algn="l" defTabSz="914400" rtl="0" eaLnBrk="1" latinLnBrk="0" hangingPunct="1">
+      <a:defRPr sz="1200" kern="1200">
+        <a:solidFill>
+          <a:schemeClr val="tx1"/>
+        </a:solidFill>
+        <a:latin typeface="+mn-lt"/>
+        <a:ea typeface="+mn-ea"/>
+        <a:cs typeface="+mn-cs"/>
+      </a:defRPr>
+    </a:lvl2pPr>
+    <a:lvl3pPr marL="914400" algn="l" defTabSz="914400" rtl="0" eaLnBrk="1" latinLnBrk="0" hangingPunct="1">
+      <a:defRPr sz="1200" kern="1200">
+        <a:solidFill>
+          <a:schemeClr val="tx1"/>
+        </a:solidFill>
+        <a:latin typeface="+mn-lt"/>
+        <a:ea typeface="+mn-ea"/>
+        <a:cs typeface="+mn-cs"/>
+      </a:defRPr>
+    </a:lvl3pPr>
+    <a:lvl4pPr marL="1371600" algn="l" defTabSz="914400" rtl="0" eaLnBrk="1" latinLnBrk="0" hangingPunct="1">
+      <a:defRPr sz="1200" kern="1200">
+        <a:solidFill>
+          <a:schemeClr val="tx1"/>
+        </a:solidFill>
+        <a:latin typeface="+mn-lt"/>
+        <a:ea typeface="+mn-ea"/>
+        <a:cs typeface="+mn-cs"/>
+      </a:defRPr>
+    </a:lvl4pPr>
+    <a:lvl5pPr marL="1828800" algn="l" defTabSz="914400" rtl="0" eaLnBrk="1" latinLnBrk="0" hangingPunct="1">
+      <a:defRPr sz="1200" kern="1200">
+        <a:solidFill>
+          <a:schemeClr val="tx1"/>
+        </a:solidFill>
+        <a:latin typeface="+mn-lt"/>
+        <a:ea typeface="+mn-ea"/>
+        <a:cs typeface="+mn-cs"/>
+      </a:defRPr>
+    </a:lvl5pPr>
+    <a:lvl6pPr marL="2286000" algn="l" defTabSz="914400" rtl="0" eaLnBrk="1" latinLnBrk="0" hangingPunct="1">
+      <a:defRPr sz="1200" kern="1200">
+        <a:solidFill>
+          <a:schemeClr val="tx1"/>
+        </a:solidFill>
+        <a:latin typeface="+mn-lt"/>
+        <a:ea typeface="+mn-ea"/>
+        <a:cs typeface="+mn-cs"/>
+      </a:defRPr>
+    </a:lvl6pPr>
+    <a:lvl7pPr marL="2743200" algn="l" defTabSz="914400" rtl="0" eaLnBrk="1" latinLnBrk="0" hangingPunct="1">
+      <a:defRPr sz="1200" kern="1200">
+        <a:solidFill>
+          <a:schemeClr val="tx1"/>
+        </a:solidFill>
+        <a:latin typeface="+mn-lt"/>
+        <a:ea typeface="+mn-ea"/>
+        <a:cs typeface="+mn-cs"/>
+      </a:defRPr>
+    </a:lvl7pPr>
+    <a:lvl8pPr marL="3200400" algn="l" defTabSz="914400" rtl="0" eaLnBrk="1" latinLnBrk="0" hangingPunct="1">
+      <a:defRPr sz="1200" kern="1200">
+        <a:solidFill>
+          <a:schemeClr val="tx1"/>
+        </a:solidFill>
+        <a:latin typeface="+mn-lt"/>
+        <a:ea typeface="+mn-ea"/>
+        <a:cs typeface="+mn-cs"/>
+      </a:defRPr>
+    </a:lvl8pPr>
+    <a:lvl9pPr marL="3657600" algn="l" defTabSz="914400" rtl="0" eaLnBrk="1" latinLnBrk="0" hangingPunct="1">
+      <a:defRPr sz="1200" kern="1200">
+        <a:solidFill>
+          <a:schemeClr val="tx1"/>
+        </a:solidFill>
+        <a:latin typeface="+mn-lt"/>
+        <a:ea typeface="+mn-ea"/>
+        <a:cs typeface="+mn-cs"/>
+      </a:defRPr>
+    </a:lvl9pPr>
+  </p:notesStyle>
+</p:notesMaster>
+</file>
+
 <file path=ppt/slideLayouts/slideLayout1.xml><?xml version="1.0" encoding="utf-8"?>
 <p:sldLayout xmlns:a="http://schemas.openxmlformats.org/drawingml/2006/main" xmlns:r="http://schemas.openxmlformats.org/officeDocument/2006/relationships" xmlns:p="http://schemas.openxmlformats.org/presentationml/2006/main" type="title" preserve="1">
   <p:cSld name="Title Slide">
@@ -284,10 +637,10 @@
           <a:bodyPr/>
           <a:lstStyle/>
           <a:p>
-            <a:fld id="{24C1AB6E-FDAA-194A-A92E-EE902A211754}" type="datetimeFigureOut">
-              <a:rPr lang="en-CL" smtClean="0"/>
-              <a:t>15-03-26</a:t>
-            </a:fld>
+            <a:r>
+              <a:rPr lang="en-US"/>
+              <a:t>(c) D.Mery - PRE01</a:t>
+            </a:r>
             <a:endParaRPr lang="en-CL"/>
           </a:p>
         </p:txBody>
@@ -484,10 +837,10 @@
           <a:bodyPr/>
           <a:lstStyle/>
           <a:p>
-            <a:fld id="{24C1AB6E-FDAA-194A-A92E-EE902A211754}" type="datetimeFigureOut">
-              <a:rPr lang="en-CL" smtClean="0"/>
-              <a:t>15-03-26</a:t>
-            </a:fld>
+            <a:r>
+              <a:rPr lang="en-US"/>
+              <a:t>(c) D.Mery - PRE01</a:t>
+            </a:r>
             <a:endParaRPr lang="en-CL"/>
           </a:p>
         </p:txBody>
@@ -694,10 +1047,10 @@
           <a:bodyPr/>
           <a:lstStyle/>
           <a:p>
-            <a:fld id="{24C1AB6E-FDAA-194A-A92E-EE902A211754}" type="datetimeFigureOut">
-              <a:rPr lang="en-CL" smtClean="0"/>
-              <a:t>15-03-26</a:t>
-            </a:fld>
+            <a:r>
+              <a:rPr lang="en-US"/>
+              <a:t>(c) D.Mery - PRE01</a:t>
+            </a:r>
             <a:endParaRPr lang="en-CL"/>
           </a:p>
         </p:txBody>
@@ -894,10 +1247,10 @@
           <a:bodyPr/>
           <a:lstStyle/>
           <a:p>
-            <a:fld id="{24C1AB6E-FDAA-194A-A92E-EE902A211754}" type="datetimeFigureOut">
-              <a:rPr lang="en-CL" smtClean="0"/>
-              <a:t>15-03-26</a:t>
-            </a:fld>
+            <a:r>
+              <a:rPr lang="en-US"/>
+              <a:t>(c) D.Mery - PRE01</a:t>
+            </a:r>
             <a:endParaRPr lang="en-CL"/>
           </a:p>
         </p:txBody>
@@ -1170,10 +1523,10 @@
           <a:bodyPr/>
           <a:lstStyle/>
           <a:p>
-            <a:fld id="{24C1AB6E-FDAA-194A-A92E-EE902A211754}" type="datetimeFigureOut">
-              <a:rPr lang="en-CL" smtClean="0"/>
-              <a:t>15-03-26</a:t>
-            </a:fld>
+            <a:r>
+              <a:rPr lang="en-US"/>
+              <a:t>(c) D.Mery - PRE01</a:t>
+            </a:r>
             <a:endParaRPr lang="en-CL"/>
           </a:p>
         </p:txBody>
@@ -1438,10 +1791,10 @@
           <a:bodyPr/>
           <a:lstStyle/>
           <a:p>
-            <a:fld id="{24C1AB6E-FDAA-194A-A92E-EE902A211754}" type="datetimeFigureOut">
-              <a:rPr lang="en-CL" smtClean="0"/>
-              <a:t>15-03-26</a:t>
-            </a:fld>
+            <a:r>
+              <a:rPr lang="en-US"/>
+              <a:t>(c) D.Mery - PRE01</a:t>
+            </a:r>
             <a:endParaRPr lang="en-CL"/>
           </a:p>
         </p:txBody>
@@ -1853,10 +2206,10 @@
           <a:bodyPr/>
           <a:lstStyle/>
           <a:p>
-            <a:fld id="{24C1AB6E-FDAA-194A-A92E-EE902A211754}" type="datetimeFigureOut">
-              <a:rPr lang="en-CL" smtClean="0"/>
-              <a:t>15-03-26</a:t>
-            </a:fld>
+            <a:r>
+              <a:rPr lang="en-US"/>
+              <a:t>(c) D.Mery - PRE01</a:t>
+            </a:r>
             <a:endParaRPr lang="en-CL"/>
           </a:p>
         </p:txBody>
@@ -1995,10 +2348,10 @@
           <a:bodyPr/>
           <a:lstStyle/>
           <a:p>
-            <a:fld id="{24C1AB6E-FDAA-194A-A92E-EE902A211754}" type="datetimeFigureOut">
-              <a:rPr lang="en-CL" smtClean="0"/>
-              <a:t>15-03-26</a:t>
-            </a:fld>
+            <a:r>
+              <a:rPr lang="en-US"/>
+              <a:t>(c) D.Mery - PRE01</a:t>
+            </a:r>
             <a:endParaRPr lang="en-CL"/>
           </a:p>
         </p:txBody>
@@ -2108,10 +2461,10 @@
           <a:bodyPr/>
           <a:lstStyle/>
           <a:p>
-            <a:fld id="{24C1AB6E-FDAA-194A-A92E-EE902A211754}" type="datetimeFigureOut">
-              <a:rPr lang="en-CL" smtClean="0"/>
-              <a:t>15-03-26</a:t>
-            </a:fld>
+            <a:r>
+              <a:rPr lang="en-US"/>
+              <a:t>(c) D.Mery - PRE01</a:t>
+            </a:r>
             <a:endParaRPr lang="en-CL"/>
           </a:p>
         </p:txBody>
@@ -2421,10 +2774,10 @@
           <a:bodyPr/>
           <a:lstStyle/>
           <a:p>
-            <a:fld id="{24C1AB6E-FDAA-194A-A92E-EE902A211754}" type="datetimeFigureOut">
-              <a:rPr lang="en-CL" smtClean="0"/>
-              <a:t>15-03-26</a:t>
-            </a:fld>
+            <a:r>
+              <a:rPr lang="en-US"/>
+              <a:t>(c) D.Mery - PRE01</a:t>
+            </a:r>
             <a:endParaRPr lang="en-CL"/>
           </a:p>
         </p:txBody>
@@ -2710,10 +3063,10 @@
           <a:bodyPr/>
           <a:lstStyle/>
           <a:p>
-            <a:fld id="{24C1AB6E-FDAA-194A-A92E-EE902A211754}" type="datetimeFigureOut">
-              <a:rPr lang="en-CL" smtClean="0"/>
-              <a:t>15-03-26</a:t>
-            </a:fld>
+            <a:r>
+              <a:rPr lang="en-US"/>
+              <a:t>(c) D.Mery - PRE01</a:t>
+            </a:r>
             <a:endParaRPr lang="en-CL"/>
           </a:p>
         </p:txBody>
@@ -2953,10 +3306,10 @@
             </a:lvl1pPr>
           </a:lstStyle>
           <a:p>
-            <a:fld id="{24C1AB6E-FDAA-194A-A92E-EE902A211754}" type="datetimeFigureOut">
-              <a:rPr lang="en-CL" smtClean="0"/>
-              <a:t>15-03-26</a:t>
-            </a:fld>
+            <a:r>
+              <a:rPr lang="en-US"/>
+              <a:t>(c) D.Mery - PRE01</a:t>
+            </a:r>
             <a:endParaRPr lang="en-CL"/>
           </a:p>
         </p:txBody>
@@ -3072,6 +3425,7 @@
     <p:sldLayoutId id="2147483658" r:id="rId10"/>
     <p:sldLayoutId id="2147483659" r:id="rId11"/>
   </p:sldLayoutIdLst>
+  <p:hf hdr="0" ftr="0"/>
   <p:txStyles>
     <p:titleStyle>
       <a:lvl1pPr algn="l" defTabSz="914400" rtl="0" eaLnBrk="1" latinLnBrk="0" hangingPunct="1">
@@ -3686,7 +4040,7 @@
                 </a:solidFill>
                 <a:latin typeface="Gill Sans MT" panose="020B0502020104020203" pitchFamily="34" charset="77"/>
               </a:rPr>
-              <a:t>(CAPÍTULO 1)</a:t>
+              <a:t>(CAPÍTULO 1 – PRE01)</a:t>
             </a:r>
             <a:endParaRPr lang="es-ES_tradnl" sz="4400" noProof="1">
               <a:solidFill>
@@ -4007,6 +4361,64 @@
             <a:endParaRPr lang="en-US" dirty="0">
               <a:latin typeface="Gill Sans MT" panose="020B0502020104020203" pitchFamily="34" charset="77"/>
             </a:endParaRPr>
+          </a:p>
+        </p:txBody>
+      </p:sp>
+      <p:sp>
+        <p:nvSpPr>
+          <p:cNvPr id="3" name="Date Placeholder 2">
+            <a:extLst>
+              <a:ext uri="{FF2B5EF4-FFF2-40B4-BE49-F238E27FC236}">
+                <a16:creationId xmlns:a16="http://schemas.microsoft.com/office/drawing/2014/main" id="{AB9D615A-088D-04B7-E8A2-F5A3A252ABD2}"/>
+              </a:ext>
+            </a:extLst>
+          </p:cNvPr>
+          <p:cNvSpPr>
+            <a:spLocks noGrp="1"/>
+          </p:cNvSpPr>
+          <p:nvPr>
+            <p:ph type="dt" sz="half" idx="10"/>
+          </p:nvPr>
+        </p:nvSpPr>
+        <p:spPr/>
+        <p:txBody>
+          <a:bodyPr/>
+          <a:lstStyle/>
+          <a:p>
+            <a:r>
+              <a:rPr lang="en-US"/>
+              <a:t>(c) D.Mery - PRE01</a:t>
+            </a:r>
+            <a:endParaRPr lang="en-CL"/>
+          </a:p>
+        </p:txBody>
+      </p:sp>
+      <p:sp>
+        <p:nvSpPr>
+          <p:cNvPr id="6" name="Slide Number Placeholder 5">
+            <a:extLst>
+              <a:ext uri="{FF2B5EF4-FFF2-40B4-BE49-F238E27FC236}">
+                <a16:creationId xmlns:a16="http://schemas.microsoft.com/office/drawing/2014/main" id="{3256342D-E5B3-2C82-BD23-1FC5755AC882}"/>
+              </a:ext>
+            </a:extLst>
+          </p:cNvPr>
+          <p:cNvSpPr>
+            <a:spLocks noGrp="1"/>
+          </p:cNvSpPr>
+          <p:nvPr>
+            <p:ph type="sldNum" sz="quarter" idx="12"/>
+          </p:nvPr>
+        </p:nvSpPr>
+        <p:spPr/>
+        <p:txBody>
+          <a:bodyPr/>
+          <a:lstStyle/>
+          <a:p>
+            <a:fld id="{2C6D9BC3-FD3B-1440-AF94-145B960EB2F4}" type="slidenum">
+              <a:rPr lang="en-CL" smtClean="0"/>
+              <a:t>1</a:t>
+            </a:fld>
+            <a:endParaRPr lang="en-CL"/>
           </a:p>
         </p:txBody>
       </p:sp>
@@ -4764,6 +5176,64 @@
           </a:p>
         </p:txBody>
       </p:sp>
+      <p:sp>
+        <p:nvSpPr>
+          <p:cNvPr id="5" name="Date Placeholder 4">
+            <a:extLst>
+              <a:ext uri="{FF2B5EF4-FFF2-40B4-BE49-F238E27FC236}">
+                <a16:creationId xmlns:a16="http://schemas.microsoft.com/office/drawing/2014/main" id="{23FB824F-F0FF-3E67-163D-78C9B224A202}"/>
+              </a:ext>
+            </a:extLst>
+          </p:cNvPr>
+          <p:cNvSpPr>
+            <a:spLocks noGrp="1"/>
+          </p:cNvSpPr>
+          <p:nvPr>
+            <p:ph type="dt" sz="half" idx="10"/>
+          </p:nvPr>
+        </p:nvSpPr>
+        <p:spPr/>
+        <p:txBody>
+          <a:bodyPr/>
+          <a:lstStyle/>
+          <a:p>
+            <a:r>
+              <a:rPr lang="en-US"/>
+              <a:t>(c) D.Mery - PRE01</a:t>
+            </a:r>
+            <a:endParaRPr lang="en-CL"/>
+          </a:p>
+        </p:txBody>
+      </p:sp>
+      <p:sp>
+        <p:nvSpPr>
+          <p:cNvPr id="6" name="Slide Number Placeholder 5">
+            <a:extLst>
+              <a:ext uri="{FF2B5EF4-FFF2-40B4-BE49-F238E27FC236}">
+                <a16:creationId xmlns:a16="http://schemas.microsoft.com/office/drawing/2014/main" id="{4BD4016C-26BB-7D48-2482-8E0D227416D8}"/>
+              </a:ext>
+            </a:extLst>
+          </p:cNvPr>
+          <p:cNvSpPr>
+            <a:spLocks noGrp="1"/>
+          </p:cNvSpPr>
+          <p:nvPr>
+            <p:ph type="sldNum" sz="quarter" idx="12"/>
+          </p:nvPr>
+        </p:nvSpPr>
+        <p:spPr/>
+        <p:txBody>
+          <a:bodyPr/>
+          <a:lstStyle/>
+          <a:p>
+            <a:fld id="{2C6D9BC3-FD3B-1440-AF94-145B960EB2F4}" type="slidenum">
+              <a:rPr lang="en-CL" smtClean="0"/>
+              <a:t>10</a:t>
+            </a:fld>
+            <a:endParaRPr lang="en-CL"/>
+          </a:p>
+        </p:txBody>
+      </p:sp>
     </p:spTree>
     <p:extLst>
       <p:ext uri="{BB962C8B-B14F-4D97-AF65-F5344CB8AC3E}">
@@ -4774,13 +5244,13 @@
   <p:clrMapOvr>
     <a:masterClrMapping/>
   </p:clrMapOvr>
-  <mc:AlternateContent xmlns:mc="http://schemas.openxmlformats.org/markup-compatibility/2006">
-    <mc:Choice xmlns:p159="http://schemas.microsoft.com/office/powerpoint/2015/09/main" Requires="p159">
+  <mc:AlternateContent xmlns:mc="http://schemas.openxmlformats.org/markup-compatibility/2006" xmlns:p159="http://schemas.microsoft.com/office/powerpoint/2015/09/main">
+    <mc:Choice Requires="p159">
       <p:transition xmlns:p14="http://schemas.microsoft.com/office/powerpoint/2010/main" spd="slow" p14:dur="2000">
         <p159:morph option="byObject"/>
       </p:transition>
     </mc:Choice>
-    <mc:Fallback>
+    <mc:Fallback xmlns="">
       <p:transition spd="slow">
         <p:fade/>
       </p:transition>
@@ -4962,6 +5432,64 @@
               </a:rPr>
               <a:t>E01/P02</a:t>
             </a:r>
+          </a:p>
+        </p:txBody>
+      </p:sp>
+      <p:sp>
+        <p:nvSpPr>
+          <p:cNvPr id="2" name="Date Placeholder 1">
+            <a:extLst>
+              <a:ext uri="{FF2B5EF4-FFF2-40B4-BE49-F238E27FC236}">
+                <a16:creationId xmlns:a16="http://schemas.microsoft.com/office/drawing/2014/main" id="{EAE1E4C2-F827-2C32-55FD-75DD53D6B57C}"/>
+              </a:ext>
+            </a:extLst>
+          </p:cNvPr>
+          <p:cNvSpPr>
+            <a:spLocks noGrp="1"/>
+          </p:cNvSpPr>
+          <p:nvPr>
+            <p:ph type="dt" sz="half" idx="10"/>
+          </p:nvPr>
+        </p:nvSpPr>
+        <p:spPr/>
+        <p:txBody>
+          <a:bodyPr/>
+          <a:lstStyle/>
+          <a:p>
+            <a:r>
+              <a:rPr lang="en-US"/>
+              <a:t>(c) D.Mery - PRE01</a:t>
+            </a:r>
+            <a:endParaRPr lang="en-CL"/>
+          </a:p>
+        </p:txBody>
+      </p:sp>
+      <p:sp>
+        <p:nvSpPr>
+          <p:cNvPr id="6" name="Slide Number Placeholder 5">
+            <a:extLst>
+              <a:ext uri="{FF2B5EF4-FFF2-40B4-BE49-F238E27FC236}">
+                <a16:creationId xmlns:a16="http://schemas.microsoft.com/office/drawing/2014/main" id="{F38E660F-879D-9151-3928-096F7D0DEB22}"/>
+              </a:ext>
+            </a:extLst>
+          </p:cNvPr>
+          <p:cNvSpPr>
+            <a:spLocks noGrp="1"/>
+          </p:cNvSpPr>
+          <p:nvPr>
+            <p:ph type="sldNum" sz="quarter" idx="12"/>
+          </p:nvPr>
+        </p:nvSpPr>
+        <p:spPr/>
+        <p:txBody>
+          <a:bodyPr/>
+          <a:lstStyle/>
+          <a:p>
+            <a:fld id="{2C6D9BC3-FD3B-1440-AF94-145B960EB2F4}" type="slidenum">
+              <a:rPr lang="en-CL" smtClean="0"/>
+              <a:t>11</a:t>
+            </a:fld>
+            <a:endParaRPr lang="en-CL"/>
           </a:p>
         </p:txBody>
       </p:sp>
@@ -5534,6 +6062,64 @@
           </a:p>
         </p:txBody>
       </p:sp>
+      <p:sp>
+        <p:nvSpPr>
+          <p:cNvPr id="4" name="Date Placeholder 3">
+            <a:extLst>
+              <a:ext uri="{FF2B5EF4-FFF2-40B4-BE49-F238E27FC236}">
+                <a16:creationId xmlns:a16="http://schemas.microsoft.com/office/drawing/2014/main" id="{0C213A45-B54B-B45E-9C8E-CA739ADE86AA}"/>
+              </a:ext>
+            </a:extLst>
+          </p:cNvPr>
+          <p:cNvSpPr>
+            <a:spLocks noGrp="1"/>
+          </p:cNvSpPr>
+          <p:nvPr>
+            <p:ph type="dt" sz="half" idx="10"/>
+          </p:nvPr>
+        </p:nvSpPr>
+        <p:spPr/>
+        <p:txBody>
+          <a:bodyPr/>
+          <a:lstStyle/>
+          <a:p>
+            <a:r>
+              <a:rPr lang="en-US"/>
+              <a:t>(c) D.Mery - PRE01</a:t>
+            </a:r>
+            <a:endParaRPr lang="en-CL"/>
+          </a:p>
+        </p:txBody>
+      </p:sp>
+      <p:sp>
+        <p:nvSpPr>
+          <p:cNvPr id="7" name="Slide Number Placeholder 6">
+            <a:extLst>
+              <a:ext uri="{FF2B5EF4-FFF2-40B4-BE49-F238E27FC236}">
+                <a16:creationId xmlns:a16="http://schemas.microsoft.com/office/drawing/2014/main" id="{D7C8DD42-99BF-E3DC-9AFF-C17CDBDABA4F}"/>
+              </a:ext>
+            </a:extLst>
+          </p:cNvPr>
+          <p:cNvSpPr>
+            <a:spLocks noGrp="1"/>
+          </p:cNvSpPr>
+          <p:nvPr>
+            <p:ph type="sldNum" sz="quarter" idx="12"/>
+          </p:nvPr>
+        </p:nvSpPr>
+        <p:spPr/>
+        <p:txBody>
+          <a:bodyPr/>
+          <a:lstStyle/>
+          <a:p>
+            <a:fld id="{2C6D9BC3-FD3B-1440-AF94-145B960EB2F4}" type="slidenum">
+              <a:rPr lang="en-CL" smtClean="0"/>
+              <a:t>12</a:t>
+            </a:fld>
+            <a:endParaRPr lang="en-CL"/>
+          </a:p>
+        </p:txBody>
+      </p:sp>
     </p:spTree>
     <p:extLst>
       <p:ext uri="{BB962C8B-B14F-4D97-AF65-F5344CB8AC3E}">
@@ -5723,6 +6309,64 @@
           </a:p>
         </p:txBody>
       </p:sp>
+      <p:sp>
+        <p:nvSpPr>
+          <p:cNvPr id="2" name="Date Placeholder 1">
+            <a:extLst>
+              <a:ext uri="{FF2B5EF4-FFF2-40B4-BE49-F238E27FC236}">
+                <a16:creationId xmlns:a16="http://schemas.microsoft.com/office/drawing/2014/main" id="{A4D7BA71-49EE-84E2-CF78-17E75C291910}"/>
+              </a:ext>
+            </a:extLst>
+          </p:cNvPr>
+          <p:cNvSpPr>
+            <a:spLocks noGrp="1"/>
+          </p:cNvSpPr>
+          <p:nvPr>
+            <p:ph type="dt" sz="half" idx="10"/>
+          </p:nvPr>
+        </p:nvSpPr>
+        <p:spPr/>
+        <p:txBody>
+          <a:bodyPr/>
+          <a:lstStyle/>
+          <a:p>
+            <a:r>
+              <a:rPr lang="en-US"/>
+              <a:t>(c) D.Mery - PRE01</a:t>
+            </a:r>
+            <a:endParaRPr lang="en-CL"/>
+          </a:p>
+        </p:txBody>
+      </p:sp>
+      <p:sp>
+        <p:nvSpPr>
+          <p:cNvPr id="3" name="Slide Number Placeholder 2">
+            <a:extLst>
+              <a:ext uri="{FF2B5EF4-FFF2-40B4-BE49-F238E27FC236}">
+                <a16:creationId xmlns:a16="http://schemas.microsoft.com/office/drawing/2014/main" id="{12535AEA-5FD5-040D-6485-6D102A69CF81}"/>
+              </a:ext>
+            </a:extLst>
+          </p:cNvPr>
+          <p:cNvSpPr>
+            <a:spLocks noGrp="1"/>
+          </p:cNvSpPr>
+          <p:nvPr>
+            <p:ph type="sldNum" sz="quarter" idx="12"/>
+          </p:nvPr>
+        </p:nvSpPr>
+        <p:spPr/>
+        <p:txBody>
+          <a:bodyPr/>
+          <a:lstStyle/>
+          <a:p>
+            <a:fld id="{2C6D9BC3-FD3B-1440-AF94-145B960EB2F4}" type="slidenum">
+              <a:rPr lang="en-CL" smtClean="0"/>
+              <a:t>13</a:t>
+            </a:fld>
+            <a:endParaRPr lang="en-CL"/>
+          </a:p>
+        </p:txBody>
+      </p:sp>
     </p:spTree>
     <p:extLst>
       <p:ext uri="{BB962C8B-B14F-4D97-AF65-F5344CB8AC3E}">
@@ -6343,6 +6987,64 @@
           </a:p>
         </p:txBody>
       </p:sp>
+      <p:sp>
+        <p:nvSpPr>
+          <p:cNvPr id="7" name="Date Placeholder 6">
+            <a:extLst>
+              <a:ext uri="{FF2B5EF4-FFF2-40B4-BE49-F238E27FC236}">
+                <a16:creationId xmlns:a16="http://schemas.microsoft.com/office/drawing/2014/main" id="{81BB6AF5-C013-1997-6D08-CA7DC1A18ABA}"/>
+              </a:ext>
+            </a:extLst>
+          </p:cNvPr>
+          <p:cNvSpPr>
+            <a:spLocks noGrp="1"/>
+          </p:cNvSpPr>
+          <p:nvPr>
+            <p:ph type="dt" sz="half" idx="10"/>
+          </p:nvPr>
+        </p:nvSpPr>
+        <p:spPr/>
+        <p:txBody>
+          <a:bodyPr/>
+          <a:lstStyle/>
+          <a:p>
+            <a:r>
+              <a:rPr lang="en-US"/>
+              <a:t>(c) D.Mery - PRE01</a:t>
+            </a:r>
+            <a:endParaRPr lang="en-CL"/>
+          </a:p>
+        </p:txBody>
+      </p:sp>
+      <p:sp>
+        <p:nvSpPr>
+          <p:cNvPr id="8" name="Slide Number Placeholder 7">
+            <a:extLst>
+              <a:ext uri="{FF2B5EF4-FFF2-40B4-BE49-F238E27FC236}">
+                <a16:creationId xmlns:a16="http://schemas.microsoft.com/office/drawing/2014/main" id="{C9AEFC22-4494-511F-C4E6-FCCC130EBCEC}"/>
+              </a:ext>
+            </a:extLst>
+          </p:cNvPr>
+          <p:cNvSpPr>
+            <a:spLocks noGrp="1"/>
+          </p:cNvSpPr>
+          <p:nvPr>
+            <p:ph type="sldNum" sz="quarter" idx="12"/>
+          </p:nvPr>
+        </p:nvSpPr>
+        <p:spPr/>
+        <p:txBody>
+          <a:bodyPr/>
+          <a:lstStyle/>
+          <a:p>
+            <a:fld id="{2C6D9BC3-FD3B-1440-AF94-145B960EB2F4}" type="slidenum">
+              <a:rPr lang="en-CL" smtClean="0"/>
+              <a:t>14</a:t>
+            </a:fld>
+            <a:endParaRPr lang="en-CL"/>
+          </a:p>
+        </p:txBody>
+      </p:sp>
     </p:spTree>
     <p:extLst>
       <p:ext uri="{BB962C8B-B14F-4D97-AF65-F5344CB8AC3E}">
@@ -6532,6 +7234,64 @@
           </a:p>
         </p:txBody>
       </p:sp>
+      <p:sp>
+        <p:nvSpPr>
+          <p:cNvPr id="2" name="Date Placeholder 1">
+            <a:extLst>
+              <a:ext uri="{FF2B5EF4-FFF2-40B4-BE49-F238E27FC236}">
+                <a16:creationId xmlns:a16="http://schemas.microsoft.com/office/drawing/2014/main" id="{2078EA4B-F16C-2B87-62E2-17C9A4A77673}"/>
+              </a:ext>
+            </a:extLst>
+          </p:cNvPr>
+          <p:cNvSpPr>
+            <a:spLocks noGrp="1"/>
+          </p:cNvSpPr>
+          <p:nvPr>
+            <p:ph type="dt" sz="half" idx="10"/>
+          </p:nvPr>
+        </p:nvSpPr>
+        <p:spPr/>
+        <p:txBody>
+          <a:bodyPr/>
+          <a:lstStyle/>
+          <a:p>
+            <a:r>
+              <a:rPr lang="en-US"/>
+              <a:t>(c) D.Mery - PRE01</a:t>
+            </a:r>
+            <a:endParaRPr lang="en-CL"/>
+          </a:p>
+        </p:txBody>
+      </p:sp>
+      <p:sp>
+        <p:nvSpPr>
+          <p:cNvPr id="4" name="Slide Number Placeholder 3">
+            <a:extLst>
+              <a:ext uri="{FF2B5EF4-FFF2-40B4-BE49-F238E27FC236}">
+                <a16:creationId xmlns:a16="http://schemas.microsoft.com/office/drawing/2014/main" id="{DAF0B35C-FF9F-66FB-F62C-AFF0D5366270}"/>
+              </a:ext>
+            </a:extLst>
+          </p:cNvPr>
+          <p:cNvSpPr>
+            <a:spLocks noGrp="1"/>
+          </p:cNvSpPr>
+          <p:nvPr>
+            <p:ph type="sldNum" sz="quarter" idx="12"/>
+          </p:nvPr>
+        </p:nvSpPr>
+        <p:spPr/>
+        <p:txBody>
+          <a:bodyPr/>
+          <a:lstStyle/>
+          <a:p>
+            <a:fld id="{2C6D9BC3-FD3B-1440-AF94-145B960EB2F4}" type="slidenum">
+              <a:rPr lang="en-CL" smtClean="0"/>
+              <a:t>15</a:t>
+            </a:fld>
+            <a:endParaRPr lang="en-CL"/>
+          </a:p>
+        </p:txBody>
+      </p:sp>
     </p:spTree>
     <p:extLst>
       <p:ext uri="{BB962C8B-B14F-4D97-AF65-F5344CB8AC3E}">
@@ -6943,6 +7703,64 @@
           </a:p>
         </p:txBody>
       </p:sp>
+      <p:sp>
+        <p:nvSpPr>
+          <p:cNvPr id="4" name="Date Placeholder 3">
+            <a:extLst>
+              <a:ext uri="{FF2B5EF4-FFF2-40B4-BE49-F238E27FC236}">
+                <a16:creationId xmlns:a16="http://schemas.microsoft.com/office/drawing/2014/main" id="{BD5197A9-704C-AC6C-B562-3FF5534E2976}"/>
+              </a:ext>
+            </a:extLst>
+          </p:cNvPr>
+          <p:cNvSpPr>
+            <a:spLocks noGrp="1"/>
+          </p:cNvSpPr>
+          <p:nvPr>
+            <p:ph type="dt" sz="half" idx="10"/>
+          </p:nvPr>
+        </p:nvSpPr>
+        <p:spPr/>
+        <p:txBody>
+          <a:bodyPr/>
+          <a:lstStyle/>
+          <a:p>
+            <a:r>
+              <a:rPr lang="en-US"/>
+              <a:t>(c) D.Mery - PRE01</a:t>
+            </a:r>
+            <a:endParaRPr lang="en-CL"/>
+          </a:p>
+        </p:txBody>
+      </p:sp>
+      <p:sp>
+        <p:nvSpPr>
+          <p:cNvPr id="8" name="Slide Number Placeholder 7">
+            <a:extLst>
+              <a:ext uri="{FF2B5EF4-FFF2-40B4-BE49-F238E27FC236}">
+                <a16:creationId xmlns:a16="http://schemas.microsoft.com/office/drawing/2014/main" id="{1A399A17-8C4E-AB66-EAEE-A9C867B892F3}"/>
+              </a:ext>
+            </a:extLst>
+          </p:cNvPr>
+          <p:cNvSpPr>
+            <a:spLocks noGrp="1"/>
+          </p:cNvSpPr>
+          <p:nvPr>
+            <p:ph type="sldNum" sz="quarter" idx="12"/>
+          </p:nvPr>
+        </p:nvSpPr>
+        <p:spPr/>
+        <p:txBody>
+          <a:bodyPr/>
+          <a:lstStyle/>
+          <a:p>
+            <a:fld id="{2C6D9BC3-FD3B-1440-AF94-145B960EB2F4}" type="slidenum">
+              <a:rPr lang="en-CL" smtClean="0"/>
+              <a:t>16</a:t>
+            </a:fld>
+            <a:endParaRPr lang="en-CL"/>
+          </a:p>
+        </p:txBody>
+      </p:sp>
     </p:spTree>
     <p:extLst>
       <p:ext uri="{BB962C8B-B14F-4D97-AF65-F5344CB8AC3E}">
@@ -7132,6 +7950,64 @@
           </a:prstGeom>
         </p:spPr>
       </p:pic>
+      <p:sp>
+        <p:nvSpPr>
+          <p:cNvPr id="3" name="Date Placeholder 2">
+            <a:extLst>
+              <a:ext uri="{FF2B5EF4-FFF2-40B4-BE49-F238E27FC236}">
+                <a16:creationId xmlns:a16="http://schemas.microsoft.com/office/drawing/2014/main" id="{9DD4988E-272E-229E-E27A-9DD8EB85B6B5}"/>
+              </a:ext>
+            </a:extLst>
+          </p:cNvPr>
+          <p:cNvSpPr>
+            <a:spLocks noGrp="1"/>
+          </p:cNvSpPr>
+          <p:nvPr>
+            <p:ph type="dt" sz="half" idx="10"/>
+          </p:nvPr>
+        </p:nvSpPr>
+        <p:spPr/>
+        <p:txBody>
+          <a:bodyPr/>
+          <a:lstStyle/>
+          <a:p>
+            <a:r>
+              <a:rPr lang="en-US"/>
+              <a:t>(c) D.Mery - PRE01</a:t>
+            </a:r>
+            <a:endParaRPr lang="en-CL"/>
+          </a:p>
+        </p:txBody>
+      </p:sp>
+      <p:sp>
+        <p:nvSpPr>
+          <p:cNvPr id="4" name="Slide Number Placeholder 3">
+            <a:extLst>
+              <a:ext uri="{FF2B5EF4-FFF2-40B4-BE49-F238E27FC236}">
+                <a16:creationId xmlns:a16="http://schemas.microsoft.com/office/drawing/2014/main" id="{48CA4B55-8AD8-0A45-236D-74A439CA92B4}"/>
+              </a:ext>
+            </a:extLst>
+          </p:cNvPr>
+          <p:cNvSpPr>
+            <a:spLocks noGrp="1"/>
+          </p:cNvSpPr>
+          <p:nvPr>
+            <p:ph type="sldNum" sz="quarter" idx="12"/>
+          </p:nvPr>
+        </p:nvSpPr>
+        <p:spPr/>
+        <p:txBody>
+          <a:bodyPr/>
+          <a:lstStyle/>
+          <a:p>
+            <a:fld id="{2C6D9BC3-FD3B-1440-AF94-145B960EB2F4}" type="slidenum">
+              <a:rPr lang="en-CL" smtClean="0"/>
+              <a:t>17</a:t>
+            </a:fld>
+            <a:endParaRPr lang="en-CL"/>
+          </a:p>
+        </p:txBody>
+      </p:sp>
     </p:spTree>
     <p:extLst>
       <p:ext uri="{BB962C8B-B14F-4D97-AF65-F5344CB8AC3E}">
@@ -7584,6 +8460,64 @@
           </a:p>
         </p:txBody>
       </p:sp>
+      <p:sp>
+        <p:nvSpPr>
+          <p:cNvPr id="12" name="Date Placeholder 11">
+            <a:extLst>
+              <a:ext uri="{FF2B5EF4-FFF2-40B4-BE49-F238E27FC236}">
+                <a16:creationId xmlns:a16="http://schemas.microsoft.com/office/drawing/2014/main" id="{5307CBD3-77CA-7FAB-B455-4EA89EB8B9DD}"/>
+              </a:ext>
+            </a:extLst>
+          </p:cNvPr>
+          <p:cNvSpPr>
+            <a:spLocks noGrp="1"/>
+          </p:cNvSpPr>
+          <p:nvPr>
+            <p:ph type="dt" sz="half" idx="10"/>
+          </p:nvPr>
+        </p:nvSpPr>
+        <p:spPr/>
+        <p:txBody>
+          <a:bodyPr/>
+          <a:lstStyle/>
+          <a:p>
+            <a:r>
+              <a:rPr lang="en-US"/>
+              <a:t>(c) D.Mery - PRE01</a:t>
+            </a:r>
+            <a:endParaRPr lang="en-CL"/>
+          </a:p>
+        </p:txBody>
+      </p:sp>
+      <p:sp>
+        <p:nvSpPr>
+          <p:cNvPr id="13" name="Slide Number Placeholder 12">
+            <a:extLst>
+              <a:ext uri="{FF2B5EF4-FFF2-40B4-BE49-F238E27FC236}">
+                <a16:creationId xmlns:a16="http://schemas.microsoft.com/office/drawing/2014/main" id="{00720FBF-3277-7AC2-2D02-78B1FF24D7C8}"/>
+              </a:ext>
+            </a:extLst>
+          </p:cNvPr>
+          <p:cNvSpPr>
+            <a:spLocks noGrp="1"/>
+          </p:cNvSpPr>
+          <p:nvPr>
+            <p:ph type="sldNum" sz="quarter" idx="12"/>
+          </p:nvPr>
+        </p:nvSpPr>
+        <p:spPr/>
+        <p:txBody>
+          <a:bodyPr/>
+          <a:lstStyle/>
+          <a:p>
+            <a:fld id="{2C6D9BC3-FD3B-1440-AF94-145B960EB2F4}" type="slidenum">
+              <a:rPr lang="en-CL" smtClean="0"/>
+              <a:t>18</a:t>
+            </a:fld>
+            <a:endParaRPr lang="en-CL"/>
+          </a:p>
+        </p:txBody>
+      </p:sp>
     </p:spTree>
     <p:extLst>
       <p:ext uri="{BB962C8B-B14F-4D97-AF65-F5344CB8AC3E}">
@@ -7773,6 +8707,64 @@
           </a:prstGeom>
         </p:spPr>
       </p:pic>
+      <p:sp>
+        <p:nvSpPr>
+          <p:cNvPr id="2" name="Date Placeholder 1">
+            <a:extLst>
+              <a:ext uri="{FF2B5EF4-FFF2-40B4-BE49-F238E27FC236}">
+                <a16:creationId xmlns:a16="http://schemas.microsoft.com/office/drawing/2014/main" id="{B563D908-3249-22C0-7A08-79A45E5D4CC8}"/>
+              </a:ext>
+            </a:extLst>
+          </p:cNvPr>
+          <p:cNvSpPr>
+            <a:spLocks noGrp="1"/>
+          </p:cNvSpPr>
+          <p:nvPr>
+            <p:ph type="dt" sz="half" idx="10"/>
+          </p:nvPr>
+        </p:nvSpPr>
+        <p:spPr/>
+        <p:txBody>
+          <a:bodyPr/>
+          <a:lstStyle/>
+          <a:p>
+            <a:r>
+              <a:rPr lang="en-US"/>
+              <a:t>(c) D.Mery - PRE01</a:t>
+            </a:r>
+            <a:endParaRPr lang="en-CL"/>
+          </a:p>
+        </p:txBody>
+      </p:sp>
+      <p:sp>
+        <p:nvSpPr>
+          <p:cNvPr id="3" name="Slide Number Placeholder 2">
+            <a:extLst>
+              <a:ext uri="{FF2B5EF4-FFF2-40B4-BE49-F238E27FC236}">
+                <a16:creationId xmlns:a16="http://schemas.microsoft.com/office/drawing/2014/main" id="{48F46C07-658F-5D0B-9568-2A4CEB877F73}"/>
+              </a:ext>
+            </a:extLst>
+          </p:cNvPr>
+          <p:cNvSpPr>
+            <a:spLocks noGrp="1"/>
+          </p:cNvSpPr>
+          <p:nvPr>
+            <p:ph type="sldNum" sz="quarter" idx="12"/>
+          </p:nvPr>
+        </p:nvSpPr>
+        <p:spPr/>
+        <p:txBody>
+          <a:bodyPr/>
+          <a:lstStyle/>
+          <a:p>
+            <a:fld id="{2C6D9BC3-FD3B-1440-AF94-145B960EB2F4}" type="slidenum">
+              <a:rPr lang="en-CL" smtClean="0"/>
+              <a:t>19</a:t>
+            </a:fld>
+            <a:endParaRPr lang="en-CL"/>
+          </a:p>
+        </p:txBody>
+      </p:sp>
     </p:spTree>
     <p:extLst>
       <p:ext uri="{BB962C8B-B14F-4D97-AF65-F5344CB8AC3E}">
@@ -7799,7 +8791,13 @@
     </p:bg>
     <p:spTree>
       <p:nvGrpSpPr>
-        <p:cNvPr id="1" name=""/>
+        <p:cNvPr id="1" name="">
+          <a:extLst>
+            <a:ext uri="{FF2B5EF4-FFF2-40B4-BE49-F238E27FC236}">
+              <a16:creationId xmlns:a16="http://schemas.microsoft.com/office/drawing/2014/main" id="{908EF948-8639-99A7-D891-C6C48196DD4C}"/>
+            </a:ext>
+          </a:extLst>
+        </p:cNvPr>
         <p:cNvGrpSpPr/>
         <p:nvPr/>
       </p:nvGrpSpPr>
@@ -7813,10 +8811,10 @@
       </p:grpSpPr>
       <p:pic>
         <p:nvPicPr>
-          <p:cNvPr id="7" name="Picture 6">
-            <a:extLst>
-              <a:ext uri="{FF2B5EF4-FFF2-40B4-BE49-F238E27FC236}">
-                <a16:creationId xmlns:a16="http://schemas.microsoft.com/office/drawing/2014/main" id="{25777A19-AA31-7CDA-7BA8-12AF982725A5}"/>
+          <p:cNvPr id="11" name="Picture 10">
+            <a:extLst>
+              <a:ext uri="{FF2B5EF4-FFF2-40B4-BE49-F238E27FC236}">
+                <a16:creationId xmlns:a16="http://schemas.microsoft.com/office/drawing/2014/main" id="{A0477648-FED6-E083-E86F-42249288CD98}"/>
               </a:ext>
             </a:extLst>
           </p:cNvPr>
@@ -7833,61 +8831,20 @@
         </p:blipFill>
         <p:spPr>
           <a:xfrm>
-            <a:off x="194619" y="102943"/>
-            <a:ext cx="1529678" cy="863528"/>
+            <a:off x="486069" y="1994911"/>
+            <a:ext cx="11219862" cy="2875340"/>
           </a:xfrm>
           <a:prstGeom prst="rect">
             <a:avLst/>
           </a:prstGeom>
         </p:spPr>
       </p:pic>
-      <p:sp>
-        <p:nvSpPr>
-          <p:cNvPr id="8" name="TextBox 7">
-            <a:extLst>
-              <a:ext uri="{FF2B5EF4-FFF2-40B4-BE49-F238E27FC236}">
-                <a16:creationId xmlns:a16="http://schemas.microsoft.com/office/drawing/2014/main" id="{0A10C4C5-7401-CE83-8D58-CC6BAE8E44BF}"/>
-              </a:ext>
-            </a:extLst>
-          </p:cNvPr>
-          <p:cNvSpPr txBox="1"/>
-          <p:nvPr/>
-        </p:nvSpPr>
-        <p:spPr>
-          <a:xfrm>
-            <a:off x="1719544" y="258585"/>
-            <a:ext cx="2151551" cy="707886"/>
-          </a:xfrm>
-          <a:prstGeom prst="rect">
-            <a:avLst/>
-          </a:prstGeom>
-          <a:noFill/>
-        </p:spPr>
-        <p:txBody>
-          <a:bodyPr wrap="none" rtlCol="0">
-            <a:spAutoFit/>
-          </a:bodyPr>
-          <a:lstStyle/>
-          <a:p>
-            <a:r>
-              <a:rPr lang="en-CL" sz="4000" b="1" dirty="0">
-                <a:solidFill>
-                  <a:srgbClr val="E97109"/>
-                </a:solidFill>
-                <a:latin typeface="Arial" panose="020B0604020202020204" pitchFamily="34" charset="0"/>
-                <a:cs typeface="Arial" panose="020B0604020202020204" pitchFamily="34" charset="0"/>
-              </a:rPr>
-              <a:t>E01/P01</a:t>
-            </a:r>
-          </a:p>
-        </p:txBody>
-      </p:sp>
       <p:cxnSp>
         <p:nvCxnSpPr>
           <p:cNvPr id="10" name="Straight Connector 9">
             <a:extLst>
               <a:ext uri="{FF2B5EF4-FFF2-40B4-BE49-F238E27FC236}">
-                <a16:creationId xmlns:a16="http://schemas.microsoft.com/office/drawing/2014/main" id="{EA2E82E8-9C6F-945E-358F-CF2F0B1C8530}"/>
+                <a16:creationId xmlns:a16="http://schemas.microsoft.com/office/drawing/2014/main" id="{F4521EA6-E273-901A-B3D0-2579122761FE}"/>
               </a:ext>
             </a:extLst>
           </p:cNvPr>
@@ -7928,10 +8885,10 @@
       </p:cxnSp>
       <p:pic>
         <p:nvPicPr>
-          <p:cNvPr id="12" name="Picture 11">
-            <a:extLst>
-              <a:ext uri="{FF2B5EF4-FFF2-40B4-BE49-F238E27FC236}">
-                <a16:creationId xmlns:a16="http://schemas.microsoft.com/office/drawing/2014/main" id="{7DBF2CC7-EACE-507C-963B-6F8D49A4BC8F}"/>
+          <p:cNvPr id="3" name="Picture 2">
+            <a:extLst>
+              <a:ext uri="{FF2B5EF4-FFF2-40B4-BE49-F238E27FC236}">
+                <a16:creationId xmlns:a16="http://schemas.microsoft.com/office/drawing/2014/main" id="{72097CCF-3365-3C54-79BE-5A33EA1B8161}"/>
               </a:ext>
             </a:extLst>
           </p:cNvPr>
@@ -7948,24 +8905,308 @@
         </p:blipFill>
         <p:spPr>
           <a:xfrm>
-            <a:off x="263230" y="1586463"/>
-            <a:ext cx="10886011" cy="3290332"/>
+            <a:off x="194619" y="102943"/>
+            <a:ext cx="1529678" cy="863528"/>
           </a:xfrm>
           <a:prstGeom prst="rect">
             <a:avLst/>
           </a:prstGeom>
         </p:spPr>
       </p:pic>
+      <p:sp>
+        <p:nvSpPr>
+          <p:cNvPr id="4" name="TextBox 3">
+            <a:extLst>
+              <a:ext uri="{FF2B5EF4-FFF2-40B4-BE49-F238E27FC236}">
+                <a16:creationId xmlns:a16="http://schemas.microsoft.com/office/drawing/2014/main" id="{BB4138C4-F851-9576-6F3E-C4BF79CACC29}"/>
+              </a:ext>
+            </a:extLst>
+          </p:cNvPr>
+          <p:cNvSpPr txBox="1"/>
+          <p:nvPr/>
+        </p:nvSpPr>
+        <p:spPr>
+          <a:xfrm>
+            <a:off x="1719544" y="258585"/>
+            <a:ext cx="2151551" cy="707886"/>
+          </a:xfrm>
+          <a:prstGeom prst="rect">
+            <a:avLst/>
+          </a:prstGeom>
+          <a:noFill/>
+        </p:spPr>
+        <p:txBody>
+          <a:bodyPr wrap="none" rtlCol="0">
+            <a:spAutoFit/>
+          </a:bodyPr>
+          <a:lstStyle/>
+          <a:p>
+            <a:r>
+              <a:rPr lang="en-CL" sz="4000" b="1" dirty="0">
+                <a:solidFill>
+                  <a:srgbClr val="E97109"/>
+                </a:solidFill>
+                <a:latin typeface="Arial" panose="020B0604020202020204" pitchFamily="34" charset="0"/>
+                <a:cs typeface="Arial" panose="020B0604020202020204" pitchFamily="34" charset="0"/>
+              </a:rPr>
+              <a:t>E01/P01</a:t>
+            </a:r>
+          </a:p>
+        </p:txBody>
+      </p:sp>
+      <p:grpSp>
+        <p:nvGrpSpPr>
+          <p:cNvPr id="6" name="Group 5">
+            <a:extLst>
+              <a:ext uri="{FF2B5EF4-FFF2-40B4-BE49-F238E27FC236}">
+                <a16:creationId xmlns:a16="http://schemas.microsoft.com/office/drawing/2014/main" id="{B5196162-408F-407F-5466-B135D3E221AC}"/>
+              </a:ext>
+            </a:extLst>
+          </p:cNvPr>
+          <p:cNvGrpSpPr/>
+          <p:nvPr/>
+        </p:nvGrpSpPr>
+        <p:grpSpPr>
+          <a:xfrm>
+            <a:off x="5097163" y="4061026"/>
+            <a:ext cx="3325244" cy="1773895"/>
+            <a:chOff x="5809544" y="4011799"/>
+            <a:chExt cx="3325244" cy="1773895"/>
+          </a:xfrm>
+        </p:grpSpPr>
+        <p:sp>
+          <p:nvSpPr>
+            <p:cNvPr id="15" name="TextBox 14">
+              <a:extLst>
+                <a:ext uri="{FF2B5EF4-FFF2-40B4-BE49-F238E27FC236}">
+                  <a16:creationId xmlns:a16="http://schemas.microsoft.com/office/drawing/2014/main" id="{D0BBF3C7-70EC-5F8C-C319-86618B7B134D}"/>
+                </a:ext>
+              </a:extLst>
+            </p:cNvPr>
+            <p:cNvSpPr txBox="1"/>
+            <p:nvPr/>
+          </p:nvSpPr>
+          <p:spPr>
+            <a:xfrm>
+              <a:off x="6290740" y="5416362"/>
+              <a:ext cx="2844048" cy="369332"/>
+            </a:xfrm>
+            <a:prstGeom prst="rect">
+              <a:avLst/>
+            </a:prstGeom>
+            <a:noFill/>
+          </p:spPr>
+          <p:txBody>
+            <a:bodyPr wrap="none" rtlCol="0">
+              <a:spAutoFit/>
+            </a:bodyPr>
+            <a:lstStyle/>
+            <a:p>
+              <a:r>
+                <a:rPr lang="en-CL" dirty="0">
+                  <a:latin typeface="Consolas" panose="020B0609020204030204" pitchFamily="49" charset="0"/>
+                  <a:cs typeface="Consolas" panose="020B0609020204030204" pitchFamily="49" charset="0"/>
+                </a:rPr>
+                <a:t>Guardar en variable I</a:t>
+              </a:r>
+            </a:p>
+          </p:txBody>
+        </p:sp>
+        <p:sp>
+          <p:nvSpPr>
+            <p:cNvPr id="2" name="Arc 1">
+              <a:extLst>
+                <a:ext uri="{FF2B5EF4-FFF2-40B4-BE49-F238E27FC236}">
+                  <a16:creationId xmlns:a16="http://schemas.microsoft.com/office/drawing/2014/main" id="{223CDB96-CCAA-8C4A-6BF3-8EE1205714D4}"/>
+                </a:ext>
+              </a:extLst>
+            </p:cNvPr>
+            <p:cNvSpPr/>
+            <p:nvPr/>
+          </p:nvSpPr>
+          <p:spPr>
+            <a:xfrm rot="12684851">
+              <a:off x="5809544" y="4011799"/>
+              <a:ext cx="1751215" cy="1716905"/>
+            </a:xfrm>
+            <a:prstGeom prst="arc">
+              <a:avLst/>
+            </a:prstGeom>
+            <a:ln w="28575">
+              <a:solidFill>
+                <a:srgbClr val="FF0000"/>
+              </a:solidFill>
+              <a:headEnd type="arrow" w="med" len="med"/>
+              <a:tailEnd type="none" w="med" len="med"/>
+            </a:ln>
+          </p:spPr>
+          <p:style>
+            <a:lnRef idx="2">
+              <a:schemeClr val="accent1"/>
+            </a:lnRef>
+            <a:fillRef idx="0">
+              <a:schemeClr val="accent1"/>
+            </a:fillRef>
+            <a:effectRef idx="1">
+              <a:schemeClr val="accent1"/>
+            </a:effectRef>
+            <a:fontRef idx="minor">
+              <a:schemeClr val="tx1"/>
+            </a:fontRef>
+          </p:style>
+          <p:txBody>
+            <a:bodyPr rtlCol="0" anchor="ctr"/>
+            <a:lstStyle/>
+            <a:p>
+              <a:pPr algn="ctr"/>
+              <a:endParaRPr lang="en-CL" dirty="0"/>
+            </a:p>
+          </p:txBody>
+        </p:sp>
+      </p:grpSp>
+      <p:sp>
+        <p:nvSpPr>
+          <p:cNvPr id="7" name="Date Placeholder 6">
+            <a:extLst>
+              <a:ext uri="{FF2B5EF4-FFF2-40B4-BE49-F238E27FC236}">
+                <a16:creationId xmlns:a16="http://schemas.microsoft.com/office/drawing/2014/main" id="{CB7E6F13-96CE-C488-727B-1E1A194B01CE}"/>
+              </a:ext>
+            </a:extLst>
+          </p:cNvPr>
+          <p:cNvSpPr>
+            <a:spLocks noGrp="1"/>
+          </p:cNvSpPr>
+          <p:nvPr>
+            <p:ph type="dt" sz="half" idx="10"/>
+          </p:nvPr>
+        </p:nvSpPr>
+        <p:spPr/>
+        <p:txBody>
+          <a:bodyPr/>
+          <a:lstStyle/>
+          <a:p>
+            <a:r>
+              <a:rPr lang="en-US"/>
+              <a:t>(c) D.Mery - PRE01</a:t>
+            </a:r>
+            <a:endParaRPr lang="en-CL"/>
+          </a:p>
+        </p:txBody>
+      </p:sp>
+      <p:sp>
+        <p:nvSpPr>
+          <p:cNvPr id="9" name="Slide Number Placeholder 8">
+            <a:extLst>
+              <a:ext uri="{FF2B5EF4-FFF2-40B4-BE49-F238E27FC236}">
+                <a16:creationId xmlns:a16="http://schemas.microsoft.com/office/drawing/2014/main" id="{68F28595-8580-3A29-1371-9EA9D6A5A692}"/>
+              </a:ext>
+            </a:extLst>
+          </p:cNvPr>
+          <p:cNvSpPr>
+            <a:spLocks noGrp="1"/>
+          </p:cNvSpPr>
+          <p:nvPr>
+            <p:ph type="sldNum" sz="quarter" idx="12"/>
+          </p:nvPr>
+        </p:nvSpPr>
+        <p:spPr/>
+        <p:txBody>
+          <a:bodyPr/>
+          <a:lstStyle/>
+          <a:p>
+            <a:fld id="{2C6D9BC3-FD3B-1440-AF94-145B960EB2F4}" type="slidenum">
+              <a:rPr lang="en-CL" smtClean="0"/>
+              <a:t>2</a:t>
+            </a:fld>
+            <a:endParaRPr lang="en-CL"/>
+          </a:p>
+        </p:txBody>
+      </p:sp>
     </p:spTree>
     <p:extLst>
       <p:ext uri="{BB962C8B-B14F-4D97-AF65-F5344CB8AC3E}">
-        <p14:creationId xmlns:p14="http://schemas.microsoft.com/office/powerpoint/2010/main" val="2262496997"/>
+        <p14:creationId xmlns:p14="http://schemas.microsoft.com/office/powerpoint/2010/main" val="1387478764"/>
       </p:ext>
     </p:extLst>
   </p:cSld>
   <p:clrMapOvr>
     <a:masterClrMapping/>
   </p:clrMapOvr>
+  <p:timing>
+    <p:tnLst>
+      <p:par>
+        <p:cTn id="1" dur="indefinite" restart="never" nodeType="tmRoot">
+          <p:childTnLst>
+            <p:seq concurrent="1" nextAc="seek">
+              <p:cTn id="2" dur="indefinite" nodeType="mainSeq">
+                <p:childTnLst>
+                  <p:par>
+                    <p:cTn id="3" fill="hold">
+                      <p:stCondLst>
+                        <p:cond delay="indefinite"/>
+                      </p:stCondLst>
+                      <p:childTnLst>
+                        <p:par>
+                          <p:cTn id="4" fill="hold">
+                            <p:stCondLst>
+                              <p:cond delay="0"/>
+                            </p:stCondLst>
+                            <p:childTnLst>
+                              <p:par>
+                                <p:cTn id="5" presetID="1" presetClass="entr" presetSubtype="0" fill="hold" nodeType="clickEffect">
+                                  <p:stCondLst>
+                                    <p:cond delay="0"/>
+                                  </p:stCondLst>
+                                  <p:childTnLst>
+                                    <p:set>
+                                      <p:cBhvr>
+                                        <p:cTn id="6" dur="1" fill="hold">
+                                          <p:stCondLst>
+                                            <p:cond delay="0"/>
+                                          </p:stCondLst>
+                                        </p:cTn>
+                                        <p:tgtEl>
+                                          <p:spTgt spid="6"/>
+                                        </p:tgtEl>
+                                        <p:attrNameLst>
+                                          <p:attrName>style.visibility</p:attrName>
+                                        </p:attrNameLst>
+                                      </p:cBhvr>
+                                      <p:to>
+                                        <p:strVal val="visible"/>
+                                      </p:to>
+                                    </p:set>
+                                  </p:childTnLst>
+                                </p:cTn>
+                              </p:par>
+                            </p:childTnLst>
+                          </p:cTn>
+                        </p:par>
+                      </p:childTnLst>
+                    </p:cTn>
+                  </p:par>
+                </p:childTnLst>
+              </p:cTn>
+              <p:prevCondLst>
+                <p:cond evt="onPrev" delay="0">
+                  <p:tgtEl>
+                    <p:sldTgt/>
+                  </p:tgtEl>
+                </p:cond>
+              </p:prevCondLst>
+              <p:nextCondLst>
+                <p:cond evt="onNext" delay="0">
+                  <p:tgtEl>
+                    <p:sldTgt/>
+                  </p:tgtEl>
+                </p:cond>
+              </p:nextCondLst>
+            </p:seq>
+          </p:childTnLst>
+        </p:cTn>
+      </p:par>
+    </p:tnLst>
+  </p:timing>
 </p:sld>
 </file>
 
@@ -8145,6 +9386,64 @@
           </a:prstGeom>
         </p:spPr>
       </p:pic>
+      <p:sp>
+        <p:nvSpPr>
+          <p:cNvPr id="3" name="Date Placeholder 2">
+            <a:extLst>
+              <a:ext uri="{FF2B5EF4-FFF2-40B4-BE49-F238E27FC236}">
+                <a16:creationId xmlns:a16="http://schemas.microsoft.com/office/drawing/2014/main" id="{2F1BA180-4ADA-7598-F3F9-4CFB8AC118F9}"/>
+              </a:ext>
+            </a:extLst>
+          </p:cNvPr>
+          <p:cNvSpPr>
+            <a:spLocks noGrp="1"/>
+          </p:cNvSpPr>
+          <p:nvPr>
+            <p:ph type="dt" sz="half" idx="10"/>
+          </p:nvPr>
+        </p:nvSpPr>
+        <p:spPr/>
+        <p:txBody>
+          <a:bodyPr/>
+          <a:lstStyle/>
+          <a:p>
+            <a:r>
+              <a:rPr lang="en-US"/>
+              <a:t>(c) D.Mery - PRE01</a:t>
+            </a:r>
+            <a:endParaRPr lang="en-CL"/>
+          </a:p>
+        </p:txBody>
+      </p:sp>
+      <p:sp>
+        <p:nvSpPr>
+          <p:cNvPr id="4" name="Slide Number Placeholder 3">
+            <a:extLst>
+              <a:ext uri="{FF2B5EF4-FFF2-40B4-BE49-F238E27FC236}">
+                <a16:creationId xmlns:a16="http://schemas.microsoft.com/office/drawing/2014/main" id="{0169905C-AA3C-F770-B141-C0D110B6CFAA}"/>
+              </a:ext>
+            </a:extLst>
+          </p:cNvPr>
+          <p:cNvSpPr>
+            <a:spLocks noGrp="1"/>
+          </p:cNvSpPr>
+          <p:nvPr>
+            <p:ph type="sldNum" sz="quarter" idx="12"/>
+          </p:nvPr>
+        </p:nvSpPr>
+        <p:spPr/>
+        <p:txBody>
+          <a:bodyPr/>
+          <a:lstStyle/>
+          <a:p>
+            <a:fld id="{2C6D9BC3-FD3B-1440-AF94-145B960EB2F4}" type="slidenum">
+              <a:rPr lang="en-CL" smtClean="0"/>
+              <a:t>20</a:t>
+            </a:fld>
+            <a:endParaRPr lang="en-CL"/>
+          </a:p>
+        </p:txBody>
+      </p:sp>
     </p:spTree>
     <p:extLst>
       <p:ext uri="{BB962C8B-B14F-4D97-AF65-F5344CB8AC3E}">
@@ -8632,6 +9931,64 @@
           </p:txBody>
         </p:sp>
       </p:grpSp>
+      <p:sp>
+        <p:nvSpPr>
+          <p:cNvPr id="8" name="Date Placeholder 7">
+            <a:extLst>
+              <a:ext uri="{FF2B5EF4-FFF2-40B4-BE49-F238E27FC236}">
+                <a16:creationId xmlns:a16="http://schemas.microsoft.com/office/drawing/2014/main" id="{B2D327D1-B145-5AB4-6F8F-847E6CDE7EFE}"/>
+              </a:ext>
+            </a:extLst>
+          </p:cNvPr>
+          <p:cNvSpPr>
+            <a:spLocks noGrp="1"/>
+          </p:cNvSpPr>
+          <p:nvPr>
+            <p:ph type="dt" sz="half" idx="10"/>
+          </p:nvPr>
+        </p:nvSpPr>
+        <p:spPr/>
+        <p:txBody>
+          <a:bodyPr/>
+          <a:lstStyle/>
+          <a:p>
+            <a:r>
+              <a:rPr lang="en-US"/>
+              <a:t>(c) D.Mery - PRE01</a:t>
+            </a:r>
+            <a:endParaRPr lang="en-CL"/>
+          </a:p>
+        </p:txBody>
+      </p:sp>
+      <p:sp>
+        <p:nvSpPr>
+          <p:cNvPr id="11" name="Slide Number Placeholder 10">
+            <a:extLst>
+              <a:ext uri="{FF2B5EF4-FFF2-40B4-BE49-F238E27FC236}">
+                <a16:creationId xmlns:a16="http://schemas.microsoft.com/office/drawing/2014/main" id="{B04E1954-76DB-9980-BD5B-64A9CE2170F5}"/>
+              </a:ext>
+            </a:extLst>
+          </p:cNvPr>
+          <p:cNvSpPr>
+            <a:spLocks noGrp="1"/>
+          </p:cNvSpPr>
+          <p:nvPr>
+            <p:ph type="sldNum" sz="quarter" idx="12"/>
+          </p:nvPr>
+        </p:nvSpPr>
+        <p:spPr/>
+        <p:txBody>
+          <a:bodyPr/>
+          <a:lstStyle/>
+          <a:p>
+            <a:fld id="{2C6D9BC3-FD3B-1440-AF94-145B960EB2F4}" type="slidenum">
+              <a:rPr lang="en-CL" smtClean="0"/>
+              <a:t>21</a:t>
+            </a:fld>
+            <a:endParaRPr lang="en-CL"/>
+          </a:p>
+        </p:txBody>
+      </p:sp>
     </p:spTree>
     <p:extLst>
       <p:ext uri="{BB962C8B-B14F-4D97-AF65-F5344CB8AC3E}">
@@ -8987,6 +10344,64 @@
           </a:prstGeom>
         </p:spPr>
       </p:pic>
+      <p:sp>
+        <p:nvSpPr>
+          <p:cNvPr id="2" name="Date Placeholder 1">
+            <a:extLst>
+              <a:ext uri="{FF2B5EF4-FFF2-40B4-BE49-F238E27FC236}">
+                <a16:creationId xmlns:a16="http://schemas.microsoft.com/office/drawing/2014/main" id="{BB6FBCC8-102B-5D4E-8CCD-DD35D88C25A4}"/>
+              </a:ext>
+            </a:extLst>
+          </p:cNvPr>
+          <p:cNvSpPr>
+            <a:spLocks noGrp="1"/>
+          </p:cNvSpPr>
+          <p:nvPr>
+            <p:ph type="dt" sz="half" idx="10"/>
+          </p:nvPr>
+        </p:nvSpPr>
+        <p:spPr/>
+        <p:txBody>
+          <a:bodyPr/>
+          <a:lstStyle/>
+          <a:p>
+            <a:r>
+              <a:rPr lang="en-US"/>
+              <a:t>(c) D.Mery - PRE01</a:t>
+            </a:r>
+            <a:endParaRPr lang="en-CL"/>
+          </a:p>
+        </p:txBody>
+      </p:sp>
+      <p:sp>
+        <p:nvSpPr>
+          <p:cNvPr id="4" name="Slide Number Placeholder 3">
+            <a:extLst>
+              <a:ext uri="{FF2B5EF4-FFF2-40B4-BE49-F238E27FC236}">
+                <a16:creationId xmlns:a16="http://schemas.microsoft.com/office/drawing/2014/main" id="{A7A5FF1F-7E0D-BB02-6990-2D67898C6744}"/>
+              </a:ext>
+            </a:extLst>
+          </p:cNvPr>
+          <p:cNvSpPr>
+            <a:spLocks noGrp="1"/>
+          </p:cNvSpPr>
+          <p:nvPr>
+            <p:ph type="sldNum" sz="quarter" idx="12"/>
+          </p:nvPr>
+        </p:nvSpPr>
+        <p:spPr/>
+        <p:txBody>
+          <a:bodyPr/>
+          <a:lstStyle/>
+          <a:p>
+            <a:fld id="{2C6D9BC3-FD3B-1440-AF94-145B960EB2F4}" type="slidenum">
+              <a:rPr lang="en-CL" smtClean="0"/>
+              <a:t>22</a:t>
+            </a:fld>
+            <a:endParaRPr lang="en-CL"/>
+          </a:p>
+        </p:txBody>
+      </p:sp>
     </p:spTree>
     <p:extLst>
       <p:ext uri="{BB962C8B-B14F-4D97-AF65-F5344CB8AC3E}">
@@ -9386,6 +10801,64 @@
           </a:p>
         </p:txBody>
       </p:sp>
+      <p:sp>
+        <p:nvSpPr>
+          <p:cNvPr id="11" name="Date Placeholder 10">
+            <a:extLst>
+              <a:ext uri="{FF2B5EF4-FFF2-40B4-BE49-F238E27FC236}">
+                <a16:creationId xmlns:a16="http://schemas.microsoft.com/office/drawing/2014/main" id="{87474371-B0C7-4694-DBC2-1EF2BCC4BD1E}"/>
+              </a:ext>
+            </a:extLst>
+          </p:cNvPr>
+          <p:cNvSpPr>
+            <a:spLocks noGrp="1"/>
+          </p:cNvSpPr>
+          <p:nvPr>
+            <p:ph type="dt" sz="half" idx="10"/>
+          </p:nvPr>
+        </p:nvSpPr>
+        <p:spPr/>
+        <p:txBody>
+          <a:bodyPr/>
+          <a:lstStyle/>
+          <a:p>
+            <a:r>
+              <a:rPr lang="en-US"/>
+              <a:t>(c) D.Mery - PRE01</a:t>
+            </a:r>
+            <a:endParaRPr lang="en-CL"/>
+          </a:p>
+        </p:txBody>
+      </p:sp>
+      <p:sp>
+        <p:nvSpPr>
+          <p:cNvPr id="12" name="Slide Number Placeholder 11">
+            <a:extLst>
+              <a:ext uri="{FF2B5EF4-FFF2-40B4-BE49-F238E27FC236}">
+                <a16:creationId xmlns:a16="http://schemas.microsoft.com/office/drawing/2014/main" id="{4F5FFBAF-C1CD-D253-14CE-73CB8DA3690F}"/>
+              </a:ext>
+            </a:extLst>
+          </p:cNvPr>
+          <p:cNvSpPr>
+            <a:spLocks noGrp="1"/>
+          </p:cNvSpPr>
+          <p:nvPr>
+            <p:ph type="sldNum" sz="quarter" idx="12"/>
+          </p:nvPr>
+        </p:nvSpPr>
+        <p:spPr/>
+        <p:txBody>
+          <a:bodyPr/>
+          <a:lstStyle/>
+          <a:p>
+            <a:fld id="{2C6D9BC3-FD3B-1440-AF94-145B960EB2F4}" type="slidenum">
+              <a:rPr lang="en-CL" smtClean="0"/>
+              <a:t>23</a:t>
+            </a:fld>
+            <a:endParaRPr lang="en-CL"/>
+          </a:p>
+        </p:txBody>
+      </p:sp>
     </p:spTree>
     <p:extLst>
       <p:ext uri="{BB962C8B-B14F-4D97-AF65-F5344CB8AC3E}">
@@ -9575,6 +11048,64 @@
           </a:prstGeom>
         </p:spPr>
       </p:pic>
+      <p:sp>
+        <p:nvSpPr>
+          <p:cNvPr id="2" name="Date Placeholder 1">
+            <a:extLst>
+              <a:ext uri="{FF2B5EF4-FFF2-40B4-BE49-F238E27FC236}">
+                <a16:creationId xmlns:a16="http://schemas.microsoft.com/office/drawing/2014/main" id="{ACA87D3E-DCC7-BC8C-2088-D1104707AA05}"/>
+              </a:ext>
+            </a:extLst>
+          </p:cNvPr>
+          <p:cNvSpPr>
+            <a:spLocks noGrp="1"/>
+          </p:cNvSpPr>
+          <p:nvPr>
+            <p:ph type="dt" sz="half" idx="10"/>
+          </p:nvPr>
+        </p:nvSpPr>
+        <p:spPr/>
+        <p:txBody>
+          <a:bodyPr/>
+          <a:lstStyle/>
+          <a:p>
+            <a:r>
+              <a:rPr lang="en-US"/>
+              <a:t>(c) D.Mery - PRE01</a:t>
+            </a:r>
+            <a:endParaRPr lang="en-CL"/>
+          </a:p>
+        </p:txBody>
+      </p:sp>
+      <p:sp>
+        <p:nvSpPr>
+          <p:cNvPr id="4" name="Slide Number Placeholder 3">
+            <a:extLst>
+              <a:ext uri="{FF2B5EF4-FFF2-40B4-BE49-F238E27FC236}">
+                <a16:creationId xmlns:a16="http://schemas.microsoft.com/office/drawing/2014/main" id="{324718E8-F54A-C3DC-5C52-50A6858C6933}"/>
+              </a:ext>
+            </a:extLst>
+          </p:cNvPr>
+          <p:cNvSpPr>
+            <a:spLocks noGrp="1"/>
+          </p:cNvSpPr>
+          <p:nvPr>
+            <p:ph type="sldNum" sz="quarter" idx="12"/>
+          </p:nvPr>
+        </p:nvSpPr>
+        <p:spPr/>
+        <p:txBody>
+          <a:bodyPr/>
+          <a:lstStyle/>
+          <a:p>
+            <a:fld id="{2C6D9BC3-FD3B-1440-AF94-145B960EB2F4}" type="slidenum">
+              <a:rPr lang="en-CL" smtClean="0"/>
+              <a:t>24</a:t>
+            </a:fld>
+            <a:endParaRPr lang="en-CL"/>
+          </a:p>
+        </p:txBody>
+      </p:sp>
     </p:spTree>
     <p:extLst>
       <p:ext uri="{BB962C8B-B14F-4D97-AF65-F5344CB8AC3E}">
@@ -9764,6 +11295,64 @@
           </a:prstGeom>
         </p:spPr>
       </p:pic>
+      <p:sp>
+        <p:nvSpPr>
+          <p:cNvPr id="2" name="Date Placeholder 1">
+            <a:extLst>
+              <a:ext uri="{FF2B5EF4-FFF2-40B4-BE49-F238E27FC236}">
+                <a16:creationId xmlns:a16="http://schemas.microsoft.com/office/drawing/2014/main" id="{14425F78-4510-833D-BB24-6F74E429445A}"/>
+              </a:ext>
+            </a:extLst>
+          </p:cNvPr>
+          <p:cNvSpPr>
+            <a:spLocks noGrp="1"/>
+          </p:cNvSpPr>
+          <p:nvPr>
+            <p:ph type="dt" sz="half" idx="10"/>
+          </p:nvPr>
+        </p:nvSpPr>
+        <p:spPr/>
+        <p:txBody>
+          <a:bodyPr/>
+          <a:lstStyle/>
+          <a:p>
+            <a:r>
+              <a:rPr lang="en-US"/>
+              <a:t>(c) D.Mery - PRE01</a:t>
+            </a:r>
+            <a:endParaRPr lang="en-CL"/>
+          </a:p>
+        </p:txBody>
+      </p:sp>
+      <p:sp>
+        <p:nvSpPr>
+          <p:cNvPr id="3" name="Slide Number Placeholder 2">
+            <a:extLst>
+              <a:ext uri="{FF2B5EF4-FFF2-40B4-BE49-F238E27FC236}">
+                <a16:creationId xmlns:a16="http://schemas.microsoft.com/office/drawing/2014/main" id="{7ED3998B-4AE3-DD2A-D9F1-DC8BF6024891}"/>
+              </a:ext>
+            </a:extLst>
+          </p:cNvPr>
+          <p:cNvSpPr>
+            <a:spLocks noGrp="1"/>
+          </p:cNvSpPr>
+          <p:nvPr>
+            <p:ph type="sldNum" sz="quarter" idx="12"/>
+          </p:nvPr>
+        </p:nvSpPr>
+        <p:spPr/>
+        <p:txBody>
+          <a:bodyPr/>
+          <a:lstStyle/>
+          <a:p>
+            <a:fld id="{2C6D9BC3-FD3B-1440-AF94-145B960EB2F4}" type="slidenum">
+              <a:rPr lang="en-CL" smtClean="0"/>
+              <a:t>25</a:t>
+            </a:fld>
+            <a:endParaRPr lang="en-CL"/>
+          </a:p>
+        </p:txBody>
+      </p:sp>
     </p:spTree>
     <p:extLst>
       <p:ext uri="{BB962C8B-B14F-4D97-AF65-F5344CB8AC3E}">
@@ -10153,6 +11742,64 @@
           </a:extLst>
         </p:spPr>
       </p:pic>
+      <p:sp>
+        <p:nvSpPr>
+          <p:cNvPr id="8" name="Date Placeholder 7">
+            <a:extLst>
+              <a:ext uri="{FF2B5EF4-FFF2-40B4-BE49-F238E27FC236}">
+                <a16:creationId xmlns:a16="http://schemas.microsoft.com/office/drawing/2014/main" id="{13355DCC-E5AB-979B-C911-D63A78F2E918}"/>
+              </a:ext>
+            </a:extLst>
+          </p:cNvPr>
+          <p:cNvSpPr>
+            <a:spLocks noGrp="1"/>
+          </p:cNvSpPr>
+          <p:nvPr>
+            <p:ph type="dt" sz="half" idx="10"/>
+          </p:nvPr>
+        </p:nvSpPr>
+        <p:spPr/>
+        <p:txBody>
+          <a:bodyPr/>
+          <a:lstStyle/>
+          <a:p>
+            <a:r>
+              <a:rPr lang="en-US"/>
+              <a:t>(c) D.Mery - PRE01</a:t>
+            </a:r>
+            <a:endParaRPr lang="en-CL"/>
+          </a:p>
+        </p:txBody>
+      </p:sp>
+      <p:sp>
+        <p:nvSpPr>
+          <p:cNvPr id="11" name="Slide Number Placeholder 10">
+            <a:extLst>
+              <a:ext uri="{FF2B5EF4-FFF2-40B4-BE49-F238E27FC236}">
+                <a16:creationId xmlns:a16="http://schemas.microsoft.com/office/drawing/2014/main" id="{F1A807FA-D5F0-F065-9B59-D0F82BDACF7E}"/>
+              </a:ext>
+            </a:extLst>
+          </p:cNvPr>
+          <p:cNvSpPr>
+            <a:spLocks noGrp="1"/>
+          </p:cNvSpPr>
+          <p:nvPr>
+            <p:ph type="sldNum" sz="quarter" idx="12"/>
+          </p:nvPr>
+        </p:nvSpPr>
+        <p:spPr/>
+        <p:txBody>
+          <a:bodyPr/>
+          <a:lstStyle/>
+          <a:p>
+            <a:fld id="{2C6D9BC3-FD3B-1440-AF94-145B960EB2F4}" type="slidenum">
+              <a:rPr lang="en-CL" smtClean="0"/>
+              <a:t>26</a:t>
+            </a:fld>
+            <a:endParaRPr lang="en-CL"/>
+          </a:p>
+        </p:txBody>
+      </p:sp>
     </p:spTree>
     <p:extLst>
       <p:ext uri="{BB962C8B-B14F-4D97-AF65-F5344CB8AC3E}">
@@ -10197,6 +11844,36 @@
           <a:chExt cx="0" cy="0"/>
         </a:xfrm>
       </p:grpSpPr>
+      <p:pic>
+        <p:nvPicPr>
+          <p:cNvPr id="16" name="Picture 15">
+            <a:extLst>
+              <a:ext uri="{FF2B5EF4-FFF2-40B4-BE49-F238E27FC236}">
+                <a16:creationId xmlns:a16="http://schemas.microsoft.com/office/drawing/2014/main" id="{027A833E-D2B7-E0CE-8AEF-72B9E04CD91C}"/>
+              </a:ext>
+            </a:extLst>
+          </p:cNvPr>
+          <p:cNvPicPr>
+            <a:picLocks noChangeAspect="1"/>
+          </p:cNvPicPr>
+          <p:nvPr/>
+        </p:nvPicPr>
+        <p:blipFill>
+          <a:blip r:embed="rId2"/>
+          <a:stretch>
+            <a:fillRect/>
+          </a:stretch>
+        </p:blipFill>
+        <p:spPr>
+          <a:xfrm>
+            <a:off x="486069" y="1994911"/>
+            <a:ext cx="11219862" cy="2875340"/>
+          </a:xfrm>
+          <a:prstGeom prst="rect">
+            <a:avLst/>
+          </a:prstGeom>
+        </p:spPr>
+      </p:pic>
       <p:cxnSp>
         <p:nvCxnSpPr>
           <p:cNvPr id="10" name="Straight Connector 9">
@@ -10241,36 +11918,6 @@
           </a:fontRef>
         </p:style>
       </p:cxnSp>
-      <p:pic>
-        <p:nvPicPr>
-          <p:cNvPr id="12" name="Picture 11">
-            <a:extLst>
-              <a:ext uri="{FF2B5EF4-FFF2-40B4-BE49-F238E27FC236}">
-                <a16:creationId xmlns:a16="http://schemas.microsoft.com/office/drawing/2014/main" id="{BD0C703F-C986-4455-38DA-20E7CC2D5CF5}"/>
-              </a:ext>
-            </a:extLst>
-          </p:cNvPr>
-          <p:cNvPicPr>
-            <a:picLocks noChangeAspect="1"/>
-          </p:cNvPicPr>
-          <p:nvPr/>
-        </p:nvPicPr>
-        <p:blipFill>
-          <a:blip r:embed="rId2"/>
-          <a:stretch>
-            <a:fillRect/>
-          </a:stretch>
-        </p:blipFill>
-        <p:spPr>
-          <a:xfrm>
-            <a:off x="263230" y="1586463"/>
-            <a:ext cx="10886011" cy="3290332"/>
-          </a:xfrm>
-          <a:prstGeom prst="rect">
-            <a:avLst/>
-          </a:prstGeom>
-        </p:spPr>
-      </p:pic>
       <p:sp>
         <p:nvSpPr>
           <p:cNvPr id="13" name="Rounded Rectangle 12">
@@ -10529,188 +12176,64 @@
           </a:p>
         </p:txBody>
       </p:sp>
-      <p:grpSp>
-        <p:nvGrpSpPr>
-          <p:cNvPr id="6" name="Group 5">
-            <a:extLst>
-              <a:ext uri="{FF2B5EF4-FFF2-40B4-BE49-F238E27FC236}">
-                <a16:creationId xmlns:a16="http://schemas.microsoft.com/office/drawing/2014/main" id="{D9A80AA2-7D81-B691-CAA8-BB8529A70812}"/>
-              </a:ext>
-            </a:extLst>
-          </p:cNvPr>
-          <p:cNvGrpSpPr/>
-          <p:nvPr/>
-        </p:nvGrpSpPr>
-        <p:grpSpPr>
-          <a:xfrm>
-            <a:off x="5809544" y="4011799"/>
-            <a:ext cx="3325244" cy="1773895"/>
-            <a:chOff x="5809544" y="4011799"/>
-            <a:chExt cx="3325244" cy="1773895"/>
-          </a:xfrm>
-        </p:grpSpPr>
-        <p:sp>
-          <p:nvSpPr>
-            <p:cNvPr id="15" name="TextBox 14">
-              <a:extLst>
-                <a:ext uri="{FF2B5EF4-FFF2-40B4-BE49-F238E27FC236}">
-                  <a16:creationId xmlns:a16="http://schemas.microsoft.com/office/drawing/2014/main" id="{EB199B95-A814-58E9-9B9E-B059CD59BE41}"/>
-                </a:ext>
-              </a:extLst>
-            </p:cNvPr>
-            <p:cNvSpPr txBox="1"/>
-            <p:nvPr/>
-          </p:nvSpPr>
-          <p:spPr>
-            <a:xfrm>
-              <a:off x="6290740" y="5416362"/>
-              <a:ext cx="2844048" cy="369332"/>
-            </a:xfrm>
-            <a:prstGeom prst="rect">
-              <a:avLst/>
-            </a:prstGeom>
-            <a:noFill/>
-          </p:spPr>
-          <p:txBody>
-            <a:bodyPr wrap="none" rtlCol="0">
-              <a:spAutoFit/>
-            </a:bodyPr>
-            <a:lstStyle/>
-            <a:p>
-              <a:r>
-                <a:rPr lang="en-CL" dirty="0">
-                  <a:latin typeface="Consolas" panose="020B0609020204030204" pitchFamily="49" charset="0"/>
-                  <a:cs typeface="Consolas" panose="020B0609020204030204" pitchFamily="49" charset="0"/>
-                </a:rPr>
-                <a:t>Guardar en variable I</a:t>
-              </a:r>
-            </a:p>
-          </p:txBody>
-        </p:sp>
-        <p:sp>
-          <p:nvSpPr>
-            <p:cNvPr id="2" name="Arc 1">
-              <a:extLst>
-                <a:ext uri="{FF2B5EF4-FFF2-40B4-BE49-F238E27FC236}">
-                  <a16:creationId xmlns:a16="http://schemas.microsoft.com/office/drawing/2014/main" id="{6D7F933D-04BF-BA51-A43E-C2D2965378AA}"/>
-                </a:ext>
-              </a:extLst>
-            </p:cNvPr>
-            <p:cNvSpPr/>
-            <p:nvPr/>
-          </p:nvSpPr>
-          <p:spPr>
-            <a:xfrm rot="12684851">
-              <a:off x="5809544" y="4011799"/>
-              <a:ext cx="1751215" cy="1716905"/>
-            </a:xfrm>
-            <a:prstGeom prst="arc">
-              <a:avLst/>
-            </a:prstGeom>
-            <a:ln w="28575">
-              <a:solidFill>
-                <a:srgbClr val="FF0000"/>
-              </a:solidFill>
-              <a:headEnd type="arrow" w="med" len="med"/>
-              <a:tailEnd type="none" w="med" len="med"/>
-            </a:ln>
-          </p:spPr>
-          <p:style>
-            <a:lnRef idx="2">
-              <a:schemeClr val="accent1"/>
-            </a:lnRef>
-            <a:fillRef idx="0">
-              <a:schemeClr val="accent1"/>
-            </a:fillRef>
-            <a:effectRef idx="1">
-              <a:schemeClr val="accent1"/>
-            </a:effectRef>
-            <a:fontRef idx="minor">
-              <a:schemeClr val="tx1"/>
-            </a:fontRef>
-          </p:style>
-          <p:txBody>
-            <a:bodyPr rtlCol="0" anchor="ctr"/>
-            <a:lstStyle/>
-            <a:p>
-              <a:pPr algn="ctr"/>
-              <a:endParaRPr lang="en-CL" dirty="0"/>
-            </a:p>
-          </p:txBody>
-        </p:sp>
-      </p:grpSp>
-      <p:pic>
-        <p:nvPicPr>
-          <p:cNvPr id="8" name="Picture 7" descr="A blue circle with white squares&#10;&#10;AI-generated content may be incorrect.">
-            <a:extLst>
-              <a:ext uri="{FF2B5EF4-FFF2-40B4-BE49-F238E27FC236}">
-                <a16:creationId xmlns:a16="http://schemas.microsoft.com/office/drawing/2014/main" id="{05B9D394-9C7D-4AE3-E0C3-272D0789C0AF}"/>
-              </a:ext>
-            </a:extLst>
-          </p:cNvPr>
-          <p:cNvPicPr>
-            <a:picLocks noChangeAspect="1"/>
-          </p:cNvPicPr>
-          <p:nvPr/>
-        </p:nvPicPr>
-        <p:blipFill>
-          <a:blip r:embed="rId5"/>
-          <a:stretch>
-            <a:fillRect/>
-          </a:stretch>
-        </p:blipFill>
-        <p:spPr>
-          <a:xfrm>
-            <a:off x="4905132" y="647725"/>
-            <a:ext cx="842040" cy="861853"/>
-          </a:xfrm>
-          <a:prstGeom prst="rect">
-            <a:avLst/>
-          </a:prstGeom>
-        </p:spPr>
-      </p:pic>
-      <p:cxnSp>
-        <p:nvCxnSpPr>
-          <p:cNvPr id="11" name="Straight Arrow Connector 10">
-            <a:extLst>
-              <a:ext uri="{FF2B5EF4-FFF2-40B4-BE49-F238E27FC236}">
-                <a16:creationId xmlns:a16="http://schemas.microsoft.com/office/drawing/2014/main" id="{EE43E187-CE10-61D9-E79C-088CAFE91A5D}"/>
-              </a:ext>
-            </a:extLst>
-          </p:cNvPr>
-          <p:cNvCxnSpPr/>
-          <p:nvPr/>
-        </p:nvCxnSpPr>
-        <p:spPr>
-          <a:xfrm>
-            <a:off x="5869169" y="1043162"/>
-            <a:ext cx="592400" cy="0"/>
-          </a:xfrm>
-          <a:prstGeom prst="straightConnector1">
-            <a:avLst/>
-          </a:prstGeom>
-          <a:ln>
-            <a:solidFill>
-              <a:srgbClr val="FF0000"/>
-            </a:solidFill>
-            <a:tailEnd type="triangle"/>
-          </a:ln>
-        </p:spPr>
-        <p:style>
-          <a:lnRef idx="2">
-            <a:schemeClr val="accent1"/>
-          </a:lnRef>
-          <a:fillRef idx="0">
-            <a:schemeClr val="accent1"/>
-          </a:fillRef>
-          <a:effectRef idx="1">
-            <a:schemeClr val="accent1"/>
-          </a:effectRef>
-          <a:fontRef idx="minor">
-            <a:schemeClr val="tx1"/>
-          </a:fontRef>
-        </p:style>
-      </p:cxnSp>
+      <p:sp>
+        <p:nvSpPr>
+          <p:cNvPr id="7" name="Date Placeholder 6">
+            <a:extLst>
+              <a:ext uri="{FF2B5EF4-FFF2-40B4-BE49-F238E27FC236}">
+                <a16:creationId xmlns:a16="http://schemas.microsoft.com/office/drawing/2014/main" id="{5038FEB5-CE55-B829-42AA-FA7F8D58BEFD}"/>
+              </a:ext>
+            </a:extLst>
+          </p:cNvPr>
+          <p:cNvSpPr>
+            <a:spLocks noGrp="1"/>
+          </p:cNvSpPr>
+          <p:nvPr>
+            <p:ph type="dt" sz="half" idx="10"/>
+          </p:nvPr>
+        </p:nvSpPr>
+        <p:spPr/>
+        <p:txBody>
+          <a:bodyPr/>
+          <a:lstStyle/>
+          <a:p>
+            <a:r>
+              <a:rPr lang="en-US"/>
+              <a:t>(c) D.Mery - PRE01</a:t>
+            </a:r>
+            <a:endParaRPr lang="en-CL"/>
+          </a:p>
+        </p:txBody>
+      </p:sp>
+      <p:sp>
+        <p:nvSpPr>
+          <p:cNvPr id="9" name="Slide Number Placeholder 8">
+            <a:extLst>
+              <a:ext uri="{FF2B5EF4-FFF2-40B4-BE49-F238E27FC236}">
+                <a16:creationId xmlns:a16="http://schemas.microsoft.com/office/drawing/2014/main" id="{BFA3F339-40D5-6EB3-A9F7-8E99B2F85956}"/>
+              </a:ext>
+            </a:extLst>
+          </p:cNvPr>
+          <p:cNvSpPr>
+            <a:spLocks noGrp="1"/>
+          </p:cNvSpPr>
+          <p:nvPr>
+            <p:ph type="sldNum" sz="quarter" idx="12"/>
+          </p:nvPr>
+        </p:nvSpPr>
+        <p:spPr/>
+        <p:txBody>
+          <a:bodyPr/>
+          <a:lstStyle/>
+          <a:p>
+            <a:fld id="{2C6D9BC3-FD3B-1440-AF94-145B960EB2F4}" type="slidenum">
+              <a:rPr lang="en-CL" smtClean="0"/>
+              <a:t>3</a:t>
+            </a:fld>
+            <a:endParaRPr lang="en-CL"/>
+          </a:p>
+        </p:txBody>
+      </p:sp>
     </p:spTree>
     <p:extLst>
       <p:ext uri="{BB962C8B-B14F-4D97-AF65-F5344CB8AC3E}">
@@ -10756,51 +12279,6 @@
                                         </p:cTn>
                                         <p:tgtEl>
                                           <p:spTgt spid="1026"/>
-                                        </p:tgtEl>
-                                        <p:attrNameLst>
-                                          <p:attrName>style.visibility</p:attrName>
-                                        </p:attrNameLst>
-                                      </p:cBhvr>
-                                      <p:to>
-                                        <p:strVal val="visible"/>
-                                      </p:to>
-                                    </p:set>
-                                  </p:childTnLst>
-                                </p:cTn>
-                              </p:par>
-                            </p:childTnLst>
-                          </p:cTn>
-                        </p:par>
-                      </p:childTnLst>
-                    </p:cTn>
-                  </p:par>
-                  <p:par>
-                    <p:cTn id="7" fill="hold">
-                      <p:stCondLst>
-                        <p:cond delay="indefinite"/>
-                      </p:stCondLst>
-                      <p:childTnLst>
-                        <p:par>
-                          <p:cTn id="8" fill="hold">
-                            <p:stCondLst>
-                              <p:cond delay="0"/>
-                            </p:stCondLst>
-                            <p:childTnLst>
-                              <p:par>
-                                <p:cTn id="9" presetID="1" presetClass="entr" presetSubtype="0" fill="hold" nodeType="clickEffect">
-                                  <p:stCondLst>
-                                    <p:cond delay="0"/>
-                                  </p:stCondLst>
-                                  <p:childTnLst>
-                                    <p:set>
-                                      <p:cBhvr>
-                                        <p:cTn id="10" dur="1" fill="hold">
-                                          <p:stCondLst>
-                                            <p:cond delay="0"/>
-                                          </p:stCondLst>
-                                        </p:cTn>
-                                        <p:tgtEl>
-                                          <p:spTgt spid="6"/>
                                         </p:tgtEl>
                                         <p:attrNameLst>
                                           <p:attrName>style.visibility</p:attrName>
@@ -11020,6 +12498,64 @@
           </a:p>
         </p:txBody>
       </p:sp>
+      <p:sp>
+        <p:nvSpPr>
+          <p:cNvPr id="2" name="Date Placeholder 1">
+            <a:extLst>
+              <a:ext uri="{FF2B5EF4-FFF2-40B4-BE49-F238E27FC236}">
+                <a16:creationId xmlns:a16="http://schemas.microsoft.com/office/drawing/2014/main" id="{5A702EEE-2FDC-BE71-BB6C-6D1573D3F93D}"/>
+              </a:ext>
+            </a:extLst>
+          </p:cNvPr>
+          <p:cNvSpPr>
+            <a:spLocks noGrp="1"/>
+          </p:cNvSpPr>
+          <p:nvPr>
+            <p:ph type="dt" sz="half" idx="10"/>
+          </p:nvPr>
+        </p:nvSpPr>
+        <p:spPr/>
+        <p:txBody>
+          <a:bodyPr/>
+          <a:lstStyle/>
+          <a:p>
+            <a:r>
+              <a:rPr lang="en-US"/>
+              <a:t>(c) D.Mery - PRE01</a:t>
+            </a:r>
+            <a:endParaRPr lang="en-CL"/>
+          </a:p>
+        </p:txBody>
+      </p:sp>
+      <p:sp>
+        <p:nvSpPr>
+          <p:cNvPr id="6" name="Slide Number Placeholder 5">
+            <a:extLst>
+              <a:ext uri="{FF2B5EF4-FFF2-40B4-BE49-F238E27FC236}">
+                <a16:creationId xmlns:a16="http://schemas.microsoft.com/office/drawing/2014/main" id="{E3F4813B-B638-0BB7-222F-1A98F370D816}"/>
+              </a:ext>
+            </a:extLst>
+          </p:cNvPr>
+          <p:cNvSpPr>
+            <a:spLocks noGrp="1"/>
+          </p:cNvSpPr>
+          <p:nvPr>
+            <p:ph type="sldNum" sz="quarter" idx="12"/>
+          </p:nvPr>
+        </p:nvSpPr>
+        <p:spPr/>
+        <p:txBody>
+          <a:bodyPr/>
+          <a:lstStyle/>
+          <a:p>
+            <a:fld id="{2C6D9BC3-FD3B-1440-AF94-145B960EB2F4}" type="slidenum">
+              <a:rPr lang="en-CL" smtClean="0"/>
+              <a:t>4</a:t>
+            </a:fld>
+            <a:endParaRPr lang="en-CL"/>
+          </a:p>
+        </p:txBody>
+      </p:sp>
     </p:spTree>
     <p:extLst>
       <p:ext uri="{BB962C8B-B14F-4D97-AF65-F5344CB8AC3E}">
@@ -11223,6 +12759,64 @@
               </a:rPr>
               <a:t>E01/P02</a:t>
             </a:r>
+          </a:p>
+        </p:txBody>
+      </p:sp>
+      <p:sp>
+        <p:nvSpPr>
+          <p:cNvPr id="2" name="Date Placeholder 1">
+            <a:extLst>
+              <a:ext uri="{FF2B5EF4-FFF2-40B4-BE49-F238E27FC236}">
+                <a16:creationId xmlns:a16="http://schemas.microsoft.com/office/drawing/2014/main" id="{C4237072-16FB-7606-267E-D89838748708}"/>
+              </a:ext>
+            </a:extLst>
+          </p:cNvPr>
+          <p:cNvSpPr>
+            <a:spLocks noGrp="1"/>
+          </p:cNvSpPr>
+          <p:nvPr>
+            <p:ph type="dt" sz="half" idx="10"/>
+          </p:nvPr>
+        </p:nvSpPr>
+        <p:spPr/>
+        <p:txBody>
+          <a:bodyPr/>
+          <a:lstStyle/>
+          <a:p>
+            <a:r>
+              <a:rPr lang="en-US"/>
+              <a:t>(c) D.Mery - PRE01</a:t>
+            </a:r>
+            <a:endParaRPr lang="en-CL"/>
+          </a:p>
+        </p:txBody>
+      </p:sp>
+      <p:sp>
+        <p:nvSpPr>
+          <p:cNvPr id="5" name="Slide Number Placeholder 4">
+            <a:extLst>
+              <a:ext uri="{FF2B5EF4-FFF2-40B4-BE49-F238E27FC236}">
+                <a16:creationId xmlns:a16="http://schemas.microsoft.com/office/drawing/2014/main" id="{2A3FD961-F302-4C82-C299-AEB540FA4939}"/>
+              </a:ext>
+            </a:extLst>
+          </p:cNvPr>
+          <p:cNvSpPr>
+            <a:spLocks noGrp="1"/>
+          </p:cNvSpPr>
+          <p:nvPr>
+            <p:ph type="sldNum" sz="quarter" idx="12"/>
+          </p:nvPr>
+        </p:nvSpPr>
+        <p:spPr/>
+        <p:txBody>
+          <a:bodyPr/>
+          <a:lstStyle/>
+          <a:p>
+            <a:fld id="{2C6D9BC3-FD3B-1440-AF94-145B960EB2F4}" type="slidenum">
+              <a:rPr lang="en-CL" smtClean="0"/>
+              <a:t>5</a:t>
+            </a:fld>
+            <a:endParaRPr lang="en-CL"/>
           </a:p>
         </p:txBody>
       </p:sp>
@@ -11534,6 +13128,64 @@
           </a:p>
         </p:txBody>
       </p:sp>
+      <p:sp>
+        <p:nvSpPr>
+          <p:cNvPr id="5" name="Date Placeholder 4">
+            <a:extLst>
+              <a:ext uri="{FF2B5EF4-FFF2-40B4-BE49-F238E27FC236}">
+                <a16:creationId xmlns:a16="http://schemas.microsoft.com/office/drawing/2014/main" id="{E5632E10-4A64-2EC6-11BB-DDE9047F3274}"/>
+              </a:ext>
+            </a:extLst>
+          </p:cNvPr>
+          <p:cNvSpPr>
+            <a:spLocks noGrp="1"/>
+          </p:cNvSpPr>
+          <p:nvPr>
+            <p:ph type="dt" sz="half" idx="10"/>
+          </p:nvPr>
+        </p:nvSpPr>
+        <p:spPr/>
+        <p:txBody>
+          <a:bodyPr/>
+          <a:lstStyle/>
+          <a:p>
+            <a:r>
+              <a:rPr lang="en-US"/>
+              <a:t>(c) D.Mery - PRE01</a:t>
+            </a:r>
+            <a:endParaRPr lang="en-CL"/>
+          </a:p>
+        </p:txBody>
+      </p:sp>
+      <p:sp>
+        <p:nvSpPr>
+          <p:cNvPr id="6" name="Slide Number Placeholder 5">
+            <a:extLst>
+              <a:ext uri="{FF2B5EF4-FFF2-40B4-BE49-F238E27FC236}">
+                <a16:creationId xmlns:a16="http://schemas.microsoft.com/office/drawing/2014/main" id="{B67D5BDA-0856-A479-FB9E-2C6B50107EA7}"/>
+              </a:ext>
+            </a:extLst>
+          </p:cNvPr>
+          <p:cNvSpPr>
+            <a:spLocks noGrp="1"/>
+          </p:cNvSpPr>
+          <p:nvPr>
+            <p:ph type="sldNum" sz="quarter" idx="12"/>
+          </p:nvPr>
+        </p:nvSpPr>
+        <p:spPr/>
+        <p:txBody>
+          <a:bodyPr/>
+          <a:lstStyle/>
+          <a:p>
+            <a:fld id="{2C6D9BC3-FD3B-1440-AF94-145B960EB2F4}" type="slidenum">
+              <a:rPr lang="en-CL" smtClean="0"/>
+              <a:t>6</a:t>
+            </a:fld>
+            <a:endParaRPr lang="en-CL"/>
+          </a:p>
+        </p:txBody>
+      </p:sp>
     </p:spTree>
     <p:extLst>
       <p:ext uri="{BB962C8B-B14F-4D97-AF65-F5344CB8AC3E}">
@@ -11842,6 +13494,64 @@
           </a:p>
         </p:txBody>
       </p:sp>
+      <p:sp>
+        <p:nvSpPr>
+          <p:cNvPr id="5" name="Date Placeholder 4">
+            <a:extLst>
+              <a:ext uri="{FF2B5EF4-FFF2-40B4-BE49-F238E27FC236}">
+                <a16:creationId xmlns:a16="http://schemas.microsoft.com/office/drawing/2014/main" id="{BD2A6D8D-21AD-D7C2-9EEE-089ECF2FF649}"/>
+              </a:ext>
+            </a:extLst>
+          </p:cNvPr>
+          <p:cNvSpPr>
+            <a:spLocks noGrp="1"/>
+          </p:cNvSpPr>
+          <p:nvPr>
+            <p:ph type="dt" sz="half" idx="10"/>
+          </p:nvPr>
+        </p:nvSpPr>
+        <p:spPr/>
+        <p:txBody>
+          <a:bodyPr/>
+          <a:lstStyle/>
+          <a:p>
+            <a:r>
+              <a:rPr lang="en-US"/>
+              <a:t>(c) D.Mery - PRE01</a:t>
+            </a:r>
+            <a:endParaRPr lang="en-CL"/>
+          </a:p>
+        </p:txBody>
+      </p:sp>
+      <p:sp>
+        <p:nvSpPr>
+          <p:cNvPr id="6" name="Slide Number Placeholder 5">
+            <a:extLst>
+              <a:ext uri="{FF2B5EF4-FFF2-40B4-BE49-F238E27FC236}">
+                <a16:creationId xmlns:a16="http://schemas.microsoft.com/office/drawing/2014/main" id="{9418CDF9-BE28-68C3-22E1-C91DE65B3CE1}"/>
+              </a:ext>
+            </a:extLst>
+          </p:cNvPr>
+          <p:cNvSpPr>
+            <a:spLocks noGrp="1"/>
+          </p:cNvSpPr>
+          <p:nvPr>
+            <p:ph type="sldNum" sz="quarter" idx="12"/>
+          </p:nvPr>
+        </p:nvSpPr>
+        <p:spPr/>
+        <p:txBody>
+          <a:bodyPr/>
+          <a:lstStyle/>
+          <a:p>
+            <a:fld id="{2C6D9BC3-FD3B-1440-AF94-145B960EB2F4}" type="slidenum">
+              <a:rPr lang="en-CL" smtClean="0"/>
+              <a:t>7</a:t>
+            </a:fld>
+            <a:endParaRPr lang="en-CL"/>
+          </a:p>
+        </p:txBody>
+      </p:sp>
     </p:spTree>
     <p:extLst>
       <p:ext uri="{BB962C8B-B14F-4D97-AF65-F5344CB8AC3E}">
@@ -12147,6 +13857,64 @@
               </a:rPr>
               <a:t>img_003.png</a:t>
             </a:r>
+          </a:p>
+        </p:txBody>
+      </p:sp>
+      <p:sp>
+        <p:nvSpPr>
+          <p:cNvPr id="5" name="Date Placeholder 4">
+            <a:extLst>
+              <a:ext uri="{FF2B5EF4-FFF2-40B4-BE49-F238E27FC236}">
+                <a16:creationId xmlns:a16="http://schemas.microsoft.com/office/drawing/2014/main" id="{549823DB-74B5-4BBA-EB33-03E023B0292C}"/>
+              </a:ext>
+            </a:extLst>
+          </p:cNvPr>
+          <p:cNvSpPr>
+            <a:spLocks noGrp="1"/>
+          </p:cNvSpPr>
+          <p:nvPr>
+            <p:ph type="dt" sz="half" idx="10"/>
+          </p:nvPr>
+        </p:nvSpPr>
+        <p:spPr/>
+        <p:txBody>
+          <a:bodyPr/>
+          <a:lstStyle/>
+          <a:p>
+            <a:r>
+              <a:rPr lang="en-US"/>
+              <a:t>(c) D.Mery - PRE01</a:t>
+            </a:r>
+            <a:endParaRPr lang="en-CL"/>
+          </a:p>
+        </p:txBody>
+      </p:sp>
+      <p:sp>
+        <p:nvSpPr>
+          <p:cNvPr id="6" name="Slide Number Placeholder 5">
+            <a:extLst>
+              <a:ext uri="{FF2B5EF4-FFF2-40B4-BE49-F238E27FC236}">
+                <a16:creationId xmlns:a16="http://schemas.microsoft.com/office/drawing/2014/main" id="{1209D762-A117-7F1E-485A-2085E573A0A0}"/>
+              </a:ext>
+            </a:extLst>
+          </p:cNvPr>
+          <p:cNvSpPr>
+            <a:spLocks noGrp="1"/>
+          </p:cNvSpPr>
+          <p:nvPr>
+            <p:ph type="sldNum" sz="quarter" idx="12"/>
+          </p:nvPr>
+        </p:nvSpPr>
+        <p:spPr/>
+        <p:txBody>
+          <a:bodyPr/>
+          <a:lstStyle/>
+          <a:p>
+            <a:fld id="{2C6D9BC3-FD3B-1440-AF94-145B960EB2F4}" type="slidenum">
+              <a:rPr lang="en-CL" smtClean="0"/>
+              <a:t>8</a:t>
+            </a:fld>
+            <a:endParaRPr lang="en-CL"/>
           </a:p>
         </p:txBody>
       </p:sp>
@@ -12569,6 +14337,64 @@
               </a:rPr>
               <a:t>img_043.png</a:t>
             </a:r>
+          </a:p>
+        </p:txBody>
+      </p:sp>
+      <p:sp>
+        <p:nvSpPr>
+          <p:cNvPr id="5" name="Date Placeholder 4">
+            <a:extLst>
+              <a:ext uri="{FF2B5EF4-FFF2-40B4-BE49-F238E27FC236}">
+                <a16:creationId xmlns:a16="http://schemas.microsoft.com/office/drawing/2014/main" id="{8BB1C433-360E-6F85-4092-28BE675F30A7}"/>
+              </a:ext>
+            </a:extLst>
+          </p:cNvPr>
+          <p:cNvSpPr>
+            <a:spLocks noGrp="1"/>
+          </p:cNvSpPr>
+          <p:nvPr>
+            <p:ph type="dt" sz="half" idx="10"/>
+          </p:nvPr>
+        </p:nvSpPr>
+        <p:spPr/>
+        <p:txBody>
+          <a:bodyPr/>
+          <a:lstStyle/>
+          <a:p>
+            <a:r>
+              <a:rPr lang="en-US"/>
+              <a:t>(c) D.Mery - PRE01</a:t>
+            </a:r>
+            <a:endParaRPr lang="en-CL"/>
+          </a:p>
+        </p:txBody>
+      </p:sp>
+      <p:sp>
+        <p:nvSpPr>
+          <p:cNvPr id="6" name="Slide Number Placeholder 5">
+            <a:extLst>
+              <a:ext uri="{FF2B5EF4-FFF2-40B4-BE49-F238E27FC236}">
+                <a16:creationId xmlns:a16="http://schemas.microsoft.com/office/drawing/2014/main" id="{28B40C95-07B9-B0EF-16CA-7F41D85DD75F}"/>
+              </a:ext>
+            </a:extLst>
+          </p:cNvPr>
+          <p:cNvSpPr>
+            <a:spLocks noGrp="1"/>
+          </p:cNvSpPr>
+          <p:nvPr>
+            <p:ph type="sldNum" sz="quarter" idx="12"/>
+          </p:nvPr>
+        </p:nvSpPr>
+        <p:spPr/>
+        <p:txBody>
+          <a:bodyPr/>
+          <a:lstStyle/>
+          <a:p>
+            <a:fld id="{2C6D9BC3-FD3B-1440-AF94-145B960EB2F4}" type="slidenum">
+              <a:rPr lang="en-CL" smtClean="0"/>
+              <a:t>9</a:t>
+            </a:fld>
+            <a:endParaRPr lang="en-CL"/>
           </a:p>
         </p:txBody>
       </p:sp>
@@ -12985,4 +14811,319 @@
     </a:ext>
   </a:extLst>
 </a:theme>
+</file>
+
+<file path=ppt/theme/theme2.xml><?xml version="1.0" encoding="utf-8"?>
+<a:theme xmlns:a="http://schemas.openxmlformats.org/drawingml/2006/main" name="Office Theme">
+  <a:themeElements>
+    <a:clrScheme name="Office">
+      <a:dk1>
+        <a:sysClr val="windowText" lastClr="000000"/>
+      </a:dk1>
+      <a:lt1>
+        <a:sysClr val="window" lastClr="FFFFFF"/>
+      </a:lt1>
+      <a:dk2>
+        <a:srgbClr val="0E2841"/>
+      </a:dk2>
+      <a:lt2>
+        <a:srgbClr val="E8E8E8"/>
+      </a:lt2>
+      <a:accent1>
+        <a:srgbClr val="156082"/>
+      </a:accent1>
+      <a:accent2>
+        <a:srgbClr val="E97132"/>
+      </a:accent2>
+      <a:accent3>
+        <a:srgbClr val="196B24"/>
+      </a:accent3>
+      <a:accent4>
+        <a:srgbClr val="0F9ED5"/>
+      </a:accent4>
+      <a:accent5>
+        <a:srgbClr val="A02B93"/>
+      </a:accent5>
+      <a:accent6>
+        <a:srgbClr val="4EA72E"/>
+      </a:accent6>
+      <a:hlink>
+        <a:srgbClr val="467886"/>
+      </a:hlink>
+      <a:folHlink>
+        <a:srgbClr val="96607D"/>
+      </a:folHlink>
+    </a:clrScheme>
+    <a:fontScheme name="Office">
+      <a:majorFont>
+        <a:latin typeface="Aptos Display" panose="02110004020202020204"/>
+        <a:ea typeface=""/>
+        <a:cs typeface=""/>
+        <a:font script="Jpan" typeface="游ゴシック Light"/>
+        <a:font script="Hang" typeface="맑은 고딕"/>
+        <a:font script="Hans" typeface="等线 Light"/>
+        <a:font script="Hant" typeface="新細明體"/>
+        <a:font script="Arab" typeface="Times New Roman"/>
+        <a:font script="Hebr" typeface="Times New Roman"/>
+        <a:font script="Thai" typeface="Angsana New"/>
+        <a:font script="Ethi" typeface="Nyala"/>
+        <a:font script="Beng" typeface="Vrinda"/>
+        <a:font script="Gujr" typeface="Shruti"/>
+        <a:font script="Khmr" typeface="MoolBoran"/>
+        <a:font script="Knda" typeface="Tunga"/>
+        <a:font script="Guru" typeface="Raavi"/>
+        <a:font script="Cans" typeface="Euphemia"/>
+        <a:font script="Cher" typeface="Plantagenet Cherokee"/>
+        <a:font script="Yiii" typeface="Microsoft Yi Baiti"/>
+        <a:font script="Tibt" typeface="Microsoft Himalaya"/>
+        <a:font script="Thaa" typeface="MV Boli"/>
+        <a:font script="Deva" typeface="Mangal"/>
+        <a:font script="Telu" typeface="Gautami"/>
+        <a:font script="Taml" typeface="Latha"/>
+        <a:font script="Syrc" typeface="Estrangelo Edessa"/>
+        <a:font script="Orya" typeface="Kalinga"/>
+        <a:font script="Mlym" typeface="Kartika"/>
+        <a:font script="Laoo" typeface="DokChampa"/>
+        <a:font script="Sinh" typeface="Iskoola Pota"/>
+        <a:font script="Mong" typeface="Mongolian Baiti"/>
+        <a:font script="Viet" typeface="Times New Roman"/>
+        <a:font script="Uigh" typeface="Microsoft Uighur"/>
+        <a:font script="Geor" typeface="Sylfaen"/>
+        <a:font script="Armn" typeface="Arial"/>
+        <a:font script="Bugi" typeface="Leelawadee UI"/>
+        <a:font script="Bopo" typeface="Microsoft JhengHei"/>
+        <a:font script="Java" typeface="Javanese Text"/>
+        <a:font script="Lisu" typeface="Segoe UI"/>
+        <a:font script="Mymr" typeface="Myanmar Text"/>
+        <a:font script="Nkoo" typeface="Ebrima"/>
+        <a:font script="Olck" typeface="Nirmala UI"/>
+        <a:font script="Osma" typeface="Ebrima"/>
+        <a:font script="Phag" typeface="Phagspa"/>
+        <a:font script="Syrn" typeface="Estrangelo Edessa"/>
+        <a:font script="Syrj" typeface="Estrangelo Edessa"/>
+        <a:font script="Syre" typeface="Estrangelo Edessa"/>
+        <a:font script="Sora" typeface="Nirmala UI"/>
+        <a:font script="Tale" typeface="Microsoft Tai Le"/>
+        <a:font script="Talu" typeface="Microsoft New Tai Lue"/>
+        <a:font script="Tfng" typeface="Ebrima"/>
+      </a:majorFont>
+      <a:minorFont>
+        <a:latin typeface="Aptos" panose="02110004020202020204"/>
+        <a:ea typeface=""/>
+        <a:cs typeface=""/>
+        <a:font script="Jpan" typeface="游ゴシック"/>
+        <a:font script="Hang" typeface="맑은 고딕"/>
+        <a:font script="Hans" typeface="等线"/>
+        <a:font script="Hant" typeface="新細明體"/>
+        <a:font script="Arab" typeface="Arial"/>
+        <a:font script="Hebr" typeface="Arial"/>
+        <a:font script="Thai" typeface="Cordia New"/>
+        <a:font script="Ethi" typeface="Nyala"/>
+        <a:font script="Beng" typeface="Vrinda"/>
+        <a:font script="Gujr" typeface="Shruti"/>
+        <a:font script="Khmr" typeface="DaunPenh"/>
+        <a:font script="Knda" typeface="Tunga"/>
+        <a:font script="Guru" typeface="Raavi"/>
+        <a:font script="Cans" typeface="Euphemia"/>
+        <a:font script="Cher" typeface="Plantagenet Cherokee"/>
+        <a:font script="Yiii" typeface="Microsoft Yi Baiti"/>
+        <a:font script="Tibt" typeface="Microsoft Himalaya"/>
+        <a:font script="Thaa" typeface="MV Boli"/>
+        <a:font script="Deva" typeface="Mangal"/>
+        <a:font script="Telu" typeface="Gautami"/>
+        <a:font script="Taml" typeface="Latha"/>
+        <a:font script="Syrc" typeface="Estrangelo Edessa"/>
+        <a:font script="Orya" typeface="Kalinga"/>
+        <a:font script="Mlym" typeface="Kartika"/>
+        <a:font script="Laoo" typeface="DokChampa"/>
+        <a:font script="Sinh" typeface="Iskoola Pota"/>
+        <a:font script="Mong" typeface="Mongolian Baiti"/>
+        <a:font script="Viet" typeface="Arial"/>
+        <a:font script="Uigh" typeface="Microsoft Uighur"/>
+        <a:font script="Geor" typeface="Sylfaen"/>
+        <a:font script="Armn" typeface="Arial"/>
+        <a:font script="Bugi" typeface="Leelawadee UI"/>
+        <a:font script="Bopo" typeface="Microsoft JhengHei"/>
+        <a:font script="Java" typeface="Javanese Text"/>
+        <a:font script="Lisu" typeface="Segoe UI"/>
+        <a:font script="Mymr" typeface="Myanmar Text"/>
+        <a:font script="Nkoo" typeface="Ebrima"/>
+        <a:font script="Olck" typeface="Nirmala UI"/>
+        <a:font script="Osma" typeface="Ebrima"/>
+        <a:font script="Phag" typeface="Phagspa"/>
+        <a:font script="Syrn" typeface="Estrangelo Edessa"/>
+        <a:font script="Syrj" typeface="Estrangelo Edessa"/>
+        <a:font script="Syre" typeface="Estrangelo Edessa"/>
+        <a:font script="Sora" typeface="Nirmala UI"/>
+        <a:font script="Tale" typeface="Microsoft Tai Le"/>
+        <a:font script="Talu" typeface="Microsoft New Tai Lue"/>
+        <a:font script="Tfng" typeface="Ebrima"/>
+      </a:minorFont>
+    </a:fontScheme>
+    <a:fmtScheme name="Office">
+      <a:fillStyleLst>
+        <a:solidFill>
+          <a:schemeClr val="phClr"/>
+        </a:solidFill>
+        <a:gradFill rotWithShape="1">
+          <a:gsLst>
+            <a:gs pos="0">
+              <a:schemeClr val="phClr">
+                <a:lumMod val="110000"/>
+                <a:satMod val="105000"/>
+                <a:tint val="67000"/>
+              </a:schemeClr>
+            </a:gs>
+            <a:gs pos="50000">
+              <a:schemeClr val="phClr">
+                <a:lumMod val="105000"/>
+                <a:satMod val="103000"/>
+                <a:tint val="73000"/>
+              </a:schemeClr>
+            </a:gs>
+            <a:gs pos="100000">
+              <a:schemeClr val="phClr">
+                <a:lumMod val="105000"/>
+                <a:satMod val="109000"/>
+                <a:tint val="81000"/>
+              </a:schemeClr>
+            </a:gs>
+          </a:gsLst>
+          <a:lin ang="5400000" scaled="0"/>
+        </a:gradFill>
+        <a:gradFill rotWithShape="1">
+          <a:gsLst>
+            <a:gs pos="0">
+              <a:schemeClr val="phClr">
+                <a:satMod val="103000"/>
+                <a:lumMod val="102000"/>
+                <a:tint val="94000"/>
+              </a:schemeClr>
+            </a:gs>
+            <a:gs pos="50000">
+              <a:schemeClr val="phClr">
+                <a:satMod val="110000"/>
+                <a:lumMod val="100000"/>
+                <a:shade val="100000"/>
+              </a:schemeClr>
+            </a:gs>
+            <a:gs pos="100000">
+              <a:schemeClr val="phClr">
+                <a:lumMod val="99000"/>
+                <a:satMod val="120000"/>
+                <a:shade val="78000"/>
+              </a:schemeClr>
+            </a:gs>
+          </a:gsLst>
+          <a:lin ang="5400000" scaled="0"/>
+        </a:gradFill>
+      </a:fillStyleLst>
+      <a:lnStyleLst>
+        <a:ln w="12700" cap="flat" cmpd="sng" algn="ctr">
+          <a:solidFill>
+            <a:schemeClr val="phClr"/>
+          </a:solidFill>
+          <a:prstDash val="solid"/>
+          <a:miter lim="800000"/>
+        </a:ln>
+        <a:ln w="19050" cap="flat" cmpd="sng" algn="ctr">
+          <a:solidFill>
+            <a:schemeClr val="phClr"/>
+          </a:solidFill>
+          <a:prstDash val="solid"/>
+          <a:miter lim="800000"/>
+        </a:ln>
+        <a:ln w="25400" cap="flat" cmpd="sng" algn="ctr">
+          <a:solidFill>
+            <a:schemeClr val="phClr"/>
+          </a:solidFill>
+          <a:prstDash val="solid"/>
+          <a:miter lim="800000"/>
+        </a:ln>
+      </a:lnStyleLst>
+      <a:effectStyleLst>
+        <a:effectStyle>
+          <a:effectLst/>
+        </a:effectStyle>
+        <a:effectStyle>
+          <a:effectLst/>
+        </a:effectStyle>
+        <a:effectStyle>
+          <a:effectLst>
+            <a:outerShdw blurRad="57150" dist="19050" dir="5400000" algn="ctr" rotWithShape="0">
+              <a:srgbClr val="000000">
+                <a:alpha val="63000"/>
+              </a:srgbClr>
+            </a:outerShdw>
+          </a:effectLst>
+        </a:effectStyle>
+      </a:effectStyleLst>
+      <a:bgFillStyleLst>
+        <a:solidFill>
+          <a:schemeClr val="phClr"/>
+        </a:solidFill>
+        <a:solidFill>
+          <a:schemeClr val="phClr">
+            <a:tint val="95000"/>
+            <a:satMod val="170000"/>
+          </a:schemeClr>
+        </a:solidFill>
+        <a:gradFill rotWithShape="1">
+          <a:gsLst>
+            <a:gs pos="0">
+              <a:schemeClr val="phClr">
+                <a:tint val="93000"/>
+                <a:satMod val="150000"/>
+                <a:shade val="98000"/>
+                <a:lumMod val="102000"/>
+              </a:schemeClr>
+            </a:gs>
+            <a:gs pos="50000">
+              <a:schemeClr val="phClr">
+                <a:tint val="98000"/>
+                <a:satMod val="130000"/>
+                <a:shade val="90000"/>
+                <a:lumMod val="103000"/>
+              </a:schemeClr>
+            </a:gs>
+            <a:gs pos="100000">
+              <a:schemeClr val="phClr">
+                <a:shade val="63000"/>
+                <a:satMod val="120000"/>
+              </a:schemeClr>
+            </a:gs>
+          </a:gsLst>
+          <a:lin ang="5400000" scaled="0"/>
+        </a:gradFill>
+      </a:bgFillStyleLst>
+    </a:fmtScheme>
+  </a:themeElements>
+  <a:objectDefaults>
+    <a:lnDef>
+      <a:spPr/>
+      <a:bodyPr/>
+      <a:lstStyle/>
+      <a:style>
+        <a:lnRef idx="2">
+          <a:schemeClr val="accent1"/>
+        </a:lnRef>
+        <a:fillRef idx="0">
+          <a:schemeClr val="accent1"/>
+        </a:fillRef>
+        <a:effectRef idx="1">
+          <a:schemeClr val="accent1"/>
+        </a:effectRef>
+        <a:fontRef idx="minor">
+          <a:schemeClr val="tx1"/>
+        </a:fontRef>
+      </a:style>
+    </a:lnDef>
+  </a:objectDefaults>
+  <a:extraClrSchemeLst/>
+  <a:extLst>
+    <a:ext uri="{05A4C25C-085E-4340-85A3-A5531E510DB2}">
+      <thm15:themeFamily xmlns:thm15="http://schemas.microsoft.com/office/thememl/2012/main" name="Office Theme" id="{2E142A2C-CD16-42D6-873A-C26D2A0506FA}" vid="{1BDDFF52-6CD6-40A5-AB3C-68EB2F1E4D0A}"/>
+    </a:ext>
+  </a:extLst>
+</a:theme>
 </file>